--- a/static/ppts/G8_Sci_Energy_Transfer.pptx
+++ b/static/ppts/G8_Sci_Energy_Transfer.pptx
@@ -10,9 +10,12 @@
     <p:sldId id="258" r:id="rId4"/>
     <p:sldId id="259" r:id="rId5"/>
     <p:sldId id="260" r:id="rId6"/>
+    <p:sldId id="261" r:id="rId7"/>
+    <p:sldId id="262" r:id="rId8"/>
+    <p:sldId id="263" r:id="rId9"/>
   </p:sldIdLst>
   <p:notesMasterIdLst>
-    <p:notesMasterId r:id="rId7"/>
+    <p:notesMasterId r:id="rId10"/>
   </p:notesMasterIdLst>
   <p:sldSz cx="9144000" cy="5143500"/>
   <p:notesSz cx="5143500" cy="9144000"/>
@@ -900,6 +903,270 @@
 </p:notes>
 </file>
 
+<file path=ppt/notesSlides/notesSlide6.xml><?xml version="1.0" encoding="utf-8"?>
+<p:notes xmlns:a="http://schemas.openxmlformats.org/drawingml/2006/main" xmlns:r="http://schemas.openxmlformats.org/officeDocument/2006/relationships" xmlns:p="http://schemas.openxmlformats.org/presentationml/2006/main">
+  <p:cSld>
+    <p:spTree>
+      <p:nvGrpSpPr>
+        <p:cNvPr id="1" name=""/>
+        <p:cNvGrpSpPr/>
+        <p:nvPr/>
+      </p:nvGrpSpPr>
+      <p:grpSpPr>
+        <a:xfrm>
+          <a:off x="0" y="0"/>
+          <a:ext cx="0" cy="0"/>
+          <a:chOff x="0" y="0"/>
+          <a:chExt cx="0" cy="0"/>
+        </a:xfrm>
+      </p:grpSpPr>
+      <p:sp>
+        <p:nvSpPr>
+          <p:cNvPr id="2" name="Slide Image Placeholder 1"/>
+          <p:cNvSpPr>
+            <a:spLocks noGrp="1" noRot="1" noChangeAspect="1"/>
+          </p:cNvSpPr>
+          <p:nvPr>
+            <p:ph type="sldImg"/>
+          </p:nvPr>
+        </p:nvSpPr>
+        <p:spPr/>
+      </p:sp>
+      <p:sp>
+        <p:nvSpPr>
+          <p:cNvPr id="3" name="Notes Placeholder 2"/>
+          <p:cNvSpPr>
+            <a:spLocks noGrp="1"/>
+          </p:cNvSpPr>
+          <p:nvPr>
+            <p:ph type="body" idx="1"/>
+          </p:nvPr>
+        </p:nvSpPr>
+        <p:spPr/>
+        <p:txBody>
+          <a:bodyPr/>
+          <a:lstStyle/>
+          <a:p>
+            <a:r>
+              <a:rPr lang="en-US" dirty="0"/>
+              <a:t/>
+            </a:r>
+            <a:endParaRPr lang="en-US" dirty="0"/>
+          </a:p>
+        </p:txBody>
+      </p:sp>
+      <p:sp>
+        <p:nvSpPr>
+          <p:cNvPr id="4" name="Slide Number Placeholder 3"/>
+          <p:cNvSpPr>
+            <a:spLocks noGrp="1"/>
+          </p:cNvSpPr>
+          <p:nvPr>
+            <p:ph type="sldNum" sz="quarter" idx="10"/>
+          </p:nvPr>
+        </p:nvSpPr>
+        <p:spPr/>
+        <p:txBody>
+          <a:bodyPr/>
+          <a:lstStyle/>
+          <a:p>
+            <a:fld id="{F7021451-1387-4CA6-816F-3879F97B5CBC}" type="slidenum">
+              <a:rPr lang="en-US"/>
+              <a:t>6</a:t>
+            </a:fld>
+            <a:endParaRPr lang="en-US"/>
+          </a:p>
+        </p:txBody>
+      </p:sp>
+    </p:spTree>
+    <p:extLst>
+      <p:ext uri="{BB962C8B-B14F-4D97-AF65-F5344CB8AC3E}">
+        <p14:creationId xmlns:p14="http://schemas.microsoft.com/office/powerpoint/2010/main" val="1024086991"/>
+      </p:ext>
+    </p:extLst>
+  </p:cSld>
+  <p:clrMapOvr>
+    <a:masterClrMapping/>
+  </p:clrMapOvr>
+</p:notes>
+</file>
+
+<file path=ppt/notesSlides/notesSlide7.xml><?xml version="1.0" encoding="utf-8"?>
+<p:notes xmlns:a="http://schemas.openxmlformats.org/drawingml/2006/main" xmlns:r="http://schemas.openxmlformats.org/officeDocument/2006/relationships" xmlns:p="http://schemas.openxmlformats.org/presentationml/2006/main">
+  <p:cSld>
+    <p:spTree>
+      <p:nvGrpSpPr>
+        <p:cNvPr id="1" name=""/>
+        <p:cNvGrpSpPr/>
+        <p:nvPr/>
+      </p:nvGrpSpPr>
+      <p:grpSpPr>
+        <a:xfrm>
+          <a:off x="0" y="0"/>
+          <a:ext cx="0" cy="0"/>
+          <a:chOff x="0" y="0"/>
+          <a:chExt cx="0" cy="0"/>
+        </a:xfrm>
+      </p:grpSpPr>
+      <p:sp>
+        <p:nvSpPr>
+          <p:cNvPr id="2" name="Slide Image Placeholder 1"/>
+          <p:cNvSpPr>
+            <a:spLocks noGrp="1" noRot="1" noChangeAspect="1"/>
+          </p:cNvSpPr>
+          <p:nvPr>
+            <p:ph type="sldImg"/>
+          </p:nvPr>
+        </p:nvSpPr>
+        <p:spPr/>
+      </p:sp>
+      <p:sp>
+        <p:nvSpPr>
+          <p:cNvPr id="3" name="Notes Placeholder 2"/>
+          <p:cNvSpPr>
+            <a:spLocks noGrp="1"/>
+          </p:cNvSpPr>
+          <p:nvPr>
+            <p:ph type="body" idx="1"/>
+          </p:nvPr>
+        </p:nvSpPr>
+        <p:spPr/>
+        <p:txBody>
+          <a:bodyPr/>
+          <a:lstStyle/>
+          <a:p>
+            <a:r>
+              <a:rPr lang="en-US" dirty="0"/>
+              <a:t/>
+            </a:r>
+            <a:endParaRPr lang="en-US" dirty="0"/>
+          </a:p>
+        </p:txBody>
+      </p:sp>
+      <p:sp>
+        <p:nvSpPr>
+          <p:cNvPr id="4" name="Slide Number Placeholder 3"/>
+          <p:cNvSpPr>
+            <a:spLocks noGrp="1"/>
+          </p:cNvSpPr>
+          <p:nvPr>
+            <p:ph type="sldNum" sz="quarter" idx="10"/>
+          </p:nvPr>
+        </p:nvSpPr>
+        <p:spPr/>
+        <p:txBody>
+          <a:bodyPr/>
+          <a:lstStyle/>
+          <a:p>
+            <a:fld id="{F7021451-1387-4CA6-816F-3879F97B5CBC}" type="slidenum">
+              <a:rPr lang="en-US"/>
+              <a:t>7</a:t>
+            </a:fld>
+            <a:endParaRPr lang="en-US"/>
+          </a:p>
+        </p:txBody>
+      </p:sp>
+    </p:spTree>
+    <p:extLst>
+      <p:ext uri="{BB962C8B-B14F-4D97-AF65-F5344CB8AC3E}">
+        <p14:creationId xmlns:p14="http://schemas.microsoft.com/office/powerpoint/2010/main" val="1024086991"/>
+      </p:ext>
+    </p:extLst>
+  </p:cSld>
+  <p:clrMapOvr>
+    <a:masterClrMapping/>
+  </p:clrMapOvr>
+</p:notes>
+</file>
+
+<file path=ppt/notesSlides/notesSlide8.xml><?xml version="1.0" encoding="utf-8"?>
+<p:notes xmlns:a="http://schemas.openxmlformats.org/drawingml/2006/main" xmlns:r="http://schemas.openxmlformats.org/officeDocument/2006/relationships" xmlns:p="http://schemas.openxmlformats.org/presentationml/2006/main">
+  <p:cSld>
+    <p:spTree>
+      <p:nvGrpSpPr>
+        <p:cNvPr id="1" name=""/>
+        <p:cNvGrpSpPr/>
+        <p:nvPr/>
+      </p:nvGrpSpPr>
+      <p:grpSpPr>
+        <a:xfrm>
+          <a:off x="0" y="0"/>
+          <a:ext cx="0" cy="0"/>
+          <a:chOff x="0" y="0"/>
+          <a:chExt cx="0" cy="0"/>
+        </a:xfrm>
+      </p:grpSpPr>
+      <p:sp>
+        <p:nvSpPr>
+          <p:cNvPr id="2" name="Slide Image Placeholder 1"/>
+          <p:cNvSpPr>
+            <a:spLocks noGrp="1" noRot="1" noChangeAspect="1"/>
+          </p:cNvSpPr>
+          <p:nvPr>
+            <p:ph type="sldImg"/>
+          </p:nvPr>
+        </p:nvSpPr>
+        <p:spPr/>
+      </p:sp>
+      <p:sp>
+        <p:nvSpPr>
+          <p:cNvPr id="3" name="Notes Placeholder 2"/>
+          <p:cNvSpPr>
+            <a:spLocks noGrp="1"/>
+          </p:cNvSpPr>
+          <p:nvPr>
+            <p:ph type="body" idx="1"/>
+          </p:nvPr>
+        </p:nvSpPr>
+        <p:spPr/>
+        <p:txBody>
+          <a:bodyPr/>
+          <a:lstStyle/>
+          <a:p>
+            <a:r>
+              <a:rPr lang="en-US" dirty="0"/>
+              <a:t/>
+            </a:r>
+            <a:endParaRPr lang="en-US" dirty="0"/>
+          </a:p>
+        </p:txBody>
+      </p:sp>
+      <p:sp>
+        <p:nvSpPr>
+          <p:cNvPr id="4" name="Slide Number Placeholder 3"/>
+          <p:cNvSpPr>
+            <a:spLocks noGrp="1"/>
+          </p:cNvSpPr>
+          <p:nvPr>
+            <p:ph type="sldNum" sz="quarter" idx="10"/>
+          </p:nvPr>
+        </p:nvSpPr>
+        <p:spPr/>
+        <p:txBody>
+          <a:bodyPr/>
+          <a:lstStyle/>
+          <a:p>
+            <a:fld id="{F7021451-1387-4CA6-816F-3879F97B5CBC}" type="slidenum">
+              <a:rPr lang="en-US"/>
+              <a:t>8</a:t>
+            </a:fld>
+            <a:endParaRPr lang="en-US"/>
+          </a:p>
+        </p:txBody>
+      </p:sp>
+    </p:spTree>
+    <p:extLst>
+      <p:ext uri="{BB962C8B-B14F-4D97-AF65-F5344CB8AC3E}">
+        <p14:creationId xmlns:p14="http://schemas.microsoft.com/office/powerpoint/2010/main" val="1024086991"/>
+      </p:ext>
+    </p:extLst>
+  </p:cSld>
+  <p:clrMapOvr>
+    <a:masterClrMapping/>
+  </p:clrMapOvr>
+</p:notes>
+</file>
+
 <file path=ppt/slideLayouts/slideLayout1.xml><?xml version="1.0" encoding="utf-8"?>
 <p:sldLayout xmlns:a="http://schemas.openxmlformats.org/drawingml/2006/main" xmlns:r="http://schemas.openxmlformats.org/officeDocument/2006/relationships" xmlns:p="http://schemas.openxmlformats.org/presentationml/2006/main" preserve="1">
   <p:cSld name="DEFAULT">
@@ -1259,7 +1526,7 @@
             <a:avLst/>
           </a:prstGeom>
           <a:solidFill>
-            <a:srgbClr val="1B2A4A"/>
+            <a:srgbClr val="E9C46A"/>
           </a:solidFill>
           <a:ln/>
         </p:spPr>
@@ -1291,7 +1558,7 @@
             <a:r>
               <a:rPr lang="en-US" sz="1400" b="1" spc="400" kern="0" dirty="0">
                 <a:solidFill>
-                  <a:srgbClr val="1B2A4A"/>
+                  <a:srgbClr val="E9C46A"/>
                 </a:solidFill>
                 <a:latin typeface="Calibri" pitchFamily="34" charset="0"/>
                 <a:ea typeface="Calibri" pitchFamily="34" charset="-122"/>
@@ -1336,7 +1603,24 @@
                 <a:ea typeface="Georgia" pitchFamily="34" charset="-122"/>
                 <a:cs typeface="Georgia" pitchFamily="34" charset="-120"/>
               </a:rPr>
-              <a:t>Energy Transfer in Ecosystems</a:t>
+              <a:t>Energy Transfer</a:t>
+            </a:r>
+            <a:endParaRPr lang="en-US" sz="4000" dirty="0"/>
+          </a:p>
+          <a:p>
+            <a:pPr indent="0" marL="0">
+              <a:buNone/>
+            </a:pPr>
+            <a:r>
+              <a:rPr lang="en-US" sz="4000" b="1" dirty="0">
+                <a:solidFill>
+                  <a:srgbClr val="FFFFFF"/>
+                </a:solidFill>
+                <a:latin typeface="Georgia" pitchFamily="34" charset="0"/>
+                <a:ea typeface="Georgia" pitchFamily="34" charset="-122"/>
+                <a:cs typeface="Georgia" pitchFamily="34" charset="-120"/>
+              </a:rPr>
+              <a:t>in Ecosystems</a:t>
             </a:r>
             <a:endParaRPr lang="en-US" sz="4000" dirty="0"/>
           </a:p>
@@ -1367,7 +1651,7 @@
               <a:buNone/>
             </a:pPr>
             <a:r>
-              <a:rPr lang="en-US" sz="1600" dirty="0">
+              <a:rPr lang="en-US" sz="1600" i="1" dirty="0">
                 <a:solidFill>
                   <a:srgbClr val="9B9690"/>
                 </a:solidFill>
@@ -1375,7 +1659,7 @@
                 <a:ea typeface="Calibri" pitchFamily="34" charset="-122"/>
                 <a:cs typeface="Calibri" pitchFamily="34" charset="-120"/>
               </a:rPr>
-              <a:t>The 10% rule and energy pyramids</a:t>
+              <a:t>Where does the energy go?</a:t>
             </a:r>
             <a:endParaRPr lang="en-US" sz="1600" dirty="0"/>
           </a:p>
@@ -1406,7 +1690,7 @@
               <a:buNone/>
             </a:pPr>
             <a:r>
-              <a:rPr lang="en-US" sz="1100" dirty="0">
+              <a:rPr lang="en-US" sz="1200" dirty="0">
                 <a:solidFill>
                   <a:srgbClr val="6B6660"/>
                 </a:solidFill>
@@ -1414,9 +1698,9 @@
                 <a:ea typeface="Calibri" pitchFamily="34" charset="-122"/>
                 <a:cs typeface="Calibri" pitchFamily="34" charset="-120"/>
               </a:rPr>
-              <a:t>Mr Zocchi · NIS</a:t>
-            </a:r>
-            <a:endParaRPr lang="en-US" sz="1100" dirty="0"/>
+              <a:t>Mr Zocchi</a:t>
+            </a:r>
+            <a:endParaRPr lang="en-US" sz="1200" dirty="0"/>
           </a:p>
         </p:txBody>
       </p:sp>
@@ -1460,41 +1744,21 @@
             <a:avLst/>
           </a:prstGeom>
           <a:solidFill>
-            <a:srgbClr val="FAF8F5"/>
-          </a:solidFill>
-          <a:ln/>
-        </p:spPr>
-      </p:sp>
-      <p:sp>
-        <p:nvSpPr>
-          <p:cNvPr id="3" name="Shape 1"/>
-          <p:cNvSpPr/>
-          <p:nvPr/>
-        </p:nvSpPr>
-        <p:spPr>
-          <a:xfrm>
-            <a:off x="0" y="0"/>
-            <a:ext cx="9144000" cy="54864"/>
-          </a:xfrm>
-          <a:prstGeom prst="rect">
-            <a:avLst/>
-          </a:prstGeom>
-          <a:solidFill>
-            <a:srgbClr val="1B2A4A"/>
-          </a:solidFill>
-          <a:ln/>
-        </p:spPr>
-      </p:sp>
-      <p:sp>
-        <p:nvSpPr>
-          <p:cNvPr id="4" name="Text 2"/>
-          <p:cNvSpPr/>
-          <p:nvPr/>
-        </p:nvSpPr>
-        <p:spPr>
-          <a:xfrm>
-            <a:off x="640080" y="320040"/>
-            <a:ext cx="7863840" cy="640080"/>
+            <a:srgbClr val="111D35"/>
+          </a:solidFill>
+          <a:ln/>
+        </p:spPr>
+      </p:sp>
+      <p:sp>
+        <p:nvSpPr>
+          <p:cNvPr id="3" name="Text 1"/>
+          <p:cNvSpPr/>
+          <p:nvPr/>
+        </p:nvSpPr>
+        <p:spPr>
+          <a:xfrm>
+            <a:off x="6858000" y="182880"/>
+            <a:ext cx="2286000" cy="2743200"/>
           </a:xfrm>
           <a:prstGeom prst="rect">
             <a:avLst/>
@@ -1503,37 +1767,39 @@
           <a:ln/>
         </p:spPr>
         <p:txBody>
-          <a:bodyPr wrap="square" lIns="0" tIns="0" rIns="0" bIns="0" rtlCol="0" anchor="ctr"/>
-          <a:lstStyle/>
-          <a:p>
-            <a:pPr indent="0" marL="0">
+          <a:bodyPr wrap="square" rtlCol="0" anchor="ctr"/>
+          <a:lstStyle/>
+          <a:p>
+            <a:pPr algn="ctr" indent="0" marL="0">
               <a:buNone/>
             </a:pPr>
             <a:r>
-              <a:rPr lang="en-US" sz="2600" b="1" dirty="0">
-                <a:solidFill>
-                  <a:srgbClr val="1B2A4A"/>
+              <a:rPr lang="en-US" sz="16000" b="1" dirty="0">
+                <a:solidFill>
+                  <a:srgbClr val="E9C46A">
+                    <a:alpha val="80000"/>
+                  </a:srgbClr>
                 </a:solidFill>
                 <a:latin typeface="Georgia" pitchFamily="34" charset="0"/>
                 <a:ea typeface="Georgia" pitchFamily="34" charset="-122"/>
                 <a:cs typeface="Georgia" pitchFamily="34" charset="-120"/>
               </a:rPr>
-              <a:t>Energy Is Lost at Each Level</a:t>
-            </a:r>
-            <a:endParaRPr lang="en-US" sz="2600" dirty="0"/>
-          </a:p>
-        </p:txBody>
-      </p:sp>
-      <p:sp>
-        <p:nvSpPr>
-          <p:cNvPr id="5" name="Text 3"/>
-          <p:cNvSpPr/>
-          <p:nvPr/>
-        </p:nvSpPr>
-        <p:spPr>
-          <a:xfrm>
-            <a:off x="640080" y="1188720"/>
-            <a:ext cx="7863840" cy="3200400"/>
+              <a:t>?</a:t>
+            </a:r>
+            <a:endParaRPr lang="en-US" sz="16000" dirty="0"/>
+          </a:p>
+        </p:txBody>
+      </p:sp>
+      <p:sp>
+        <p:nvSpPr>
+          <p:cNvPr id="4" name="Text 2"/>
+          <p:cNvSpPr/>
+          <p:nvPr/>
+        </p:nvSpPr>
+        <p:spPr>
+          <a:xfrm>
+            <a:off x="731520" y="548640"/>
+            <a:ext cx="2743200" cy="365760"/>
           </a:xfrm>
           <a:prstGeom prst="rect">
             <a:avLst/>
@@ -1542,91 +1808,246 @@
           <a:ln/>
         </p:spPr>
         <p:txBody>
-          <a:bodyPr wrap="square" rtlCol="0" anchor="t"/>
-          <a:lstStyle/>
-          <a:p>
-            <a:pPr marL="342900" indent="-342900">
-              <a:lnSpc>
-                <a:spcPct val="140000"/>
-              </a:lnSpc>
-              <a:buSzPct val="100000"/>
-              <a:buChar char="•"/>
-            </a:pPr>
-            <a:r>
-              <a:rPr lang="en-US" sz="1500" dirty="0">
-                <a:solidFill>
-                  <a:srgbClr val="3D3A36"/>
+          <a:bodyPr wrap="square" rtlCol="0" anchor="ctr"/>
+          <a:lstStyle/>
+          <a:p>
+            <a:pPr indent="0" marL="0">
+              <a:buNone/>
+            </a:pPr>
+            <a:r>
+              <a:rPr lang="en-US" sz="1200" b="1" spc="400" kern="0" dirty="0">
+                <a:solidFill>
+                  <a:srgbClr val="E9C46A"/>
                 </a:solidFill>
                 <a:latin typeface="Calibri" pitchFamily="34" charset="0"/>
                 <a:ea typeface="Calibri" pitchFamily="34" charset="-122"/>
                 <a:cs typeface="Calibri" pitchFamily="34" charset="-120"/>
               </a:rPr>
-              <a:t>Energy is lost at each trophic level, mostly as heat through respiration.</a:t>
-            </a:r>
-            <a:endParaRPr lang="en-US" sz="1500" dirty="0"/>
-          </a:p>
-          <a:p>
-            <a:pPr marL="342900" indent="-342900">
-              <a:lnSpc>
-                <a:spcPct val="140000"/>
-              </a:lnSpc>
-              <a:buSzPct val="100000"/>
-              <a:buChar char="•"/>
-            </a:pPr>
-            <a:r>
-              <a:rPr lang="en-US" sz="1500" dirty="0">
-                <a:solidFill>
-                  <a:srgbClr val="3D3A36"/>
+              <a:t>INQUIRY</a:t>
+            </a:r>
+            <a:endParaRPr lang="en-US" sz="1200" dirty="0"/>
+          </a:p>
+        </p:txBody>
+      </p:sp>
+      <p:sp>
+        <p:nvSpPr>
+          <p:cNvPr id="5" name="Text 3"/>
+          <p:cNvSpPr/>
+          <p:nvPr/>
+        </p:nvSpPr>
+        <p:spPr>
+          <a:xfrm>
+            <a:off x="731520" y="1005840"/>
+            <a:ext cx="6858000" cy="1463040"/>
+          </a:xfrm>
+          <a:prstGeom prst="rect">
+            <a:avLst/>
+          </a:prstGeom>
+          <a:noFill/>
+          <a:ln/>
+        </p:spPr>
+        <p:txBody>
+          <a:bodyPr wrap="square" rtlCol="0" anchor="t"/>
+          <a:lstStyle/>
+          <a:p>
+            <a:pPr indent="0" marL="0">
+              <a:buNone/>
+            </a:pPr>
+            <a:r>
+              <a:rPr lang="en-US" sz="2800" b="1" dirty="0">
+                <a:solidFill>
+                  <a:srgbClr val="FFFFFF"/>
+                </a:solidFill>
+                <a:latin typeface="Georgia" pitchFamily="34" charset="0"/>
+                <a:ea typeface="Georgia" pitchFamily="34" charset="-122"/>
+                <a:cs typeface="Georgia" pitchFamily="34" charset="-120"/>
+              </a:rPr>
+              <a:t>China produces 30% of the world's rice. If all that rice energy was passed to humans, why is only ~10% actually used for growth?</a:t>
+            </a:r>
+            <a:endParaRPr lang="en-US" sz="2800" dirty="0"/>
+          </a:p>
+        </p:txBody>
+      </p:sp>
+      <p:sp>
+        <p:nvSpPr>
+          <p:cNvPr id="6" name="Text 4"/>
+          <p:cNvSpPr/>
+          <p:nvPr/>
+        </p:nvSpPr>
+        <p:spPr>
+          <a:xfrm>
+            <a:off x="731520" y="2560320"/>
+            <a:ext cx="6858000" cy="548640"/>
+          </a:xfrm>
+          <a:prstGeom prst="rect">
+            <a:avLst/>
+          </a:prstGeom>
+          <a:noFill/>
+          <a:ln/>
+        </p:spPr>
+        <p:txBody>
+          <a:bodyPr wrap="square" rtlCol="0" anchor="ctr"/>
+          <a:lstStyle/>
+          <a:p>
+            <a:pPr indent="0" marL="0">
+              <a:buNone/>
+            </a:pPr>
+            <a:r>
+              <a:rPr lang="en-US" sz="1400" i="1" dirty="0">
+                <a:solidFill>
+                  <a:srgbClr val="9B9690"/>
                 </a:solidFill>
                 <a:latin typeface="Calibri" pitchFamily="34" charset="0"/>
                 <a:ea typeface="Calibri" pitchFamily="34" charset="-122"/>
                 <a:cs typeface="Calibri" pitchFamily="34" charset="-120"/>
               </a:rPr>
-              <a:t>Only about 10% of energy passes from one level to the next.</a:t>
-            </a:r>
-            <a:endParaRPr lang="en-US" sz="1500" dirty="0"/>
-          </a:p>
-          <a:p>
-            <a:pPr marL="342900" indent="-342900">
-              <a:lnSpc>
-                <a:spcPct val="140000"/>
-              </a:lnSpc>
-              <a:buSzPct val="100000"/>
-              <a:buChar char="•"/>
-            </a:pPr>
-            <a:r>
-              <a:rPr lang="en-US" sz="1500" dirty="0">
-                <a:solidFill>
-                  <a:srgbClr val="3D3A36"/>
+              <a:t>Most energy is 'lost' at every step — but where does it go?</a:t>
+            </a:r>
+            <a:endParaRPr lang="en-US" sz="1400" dirty="0"/>
+          </a:p>
+        </p:txBody>
+      </p:sp>
+      <p:sp>
+        <p:nvSpPr>
+          <p:cNvPr id="7" name="Shape 5"/>
+          <p:cNvSpPr/>
+          <p:nvPr/>
+        </p:nvSpPr>
+        <p:spPr>
+          <a:xfrm>
+            <a:off x="548640" y="3200400"/>
+            <a:ext cx="7315200" cy="1645920"/>
+          </a:xfrm>
+          <a:prstGeom prst="rect">
+            <a:avLst/>
+          </a:prstGeom>
+          <a:solidFill>
+            <a:srgbClr val="243660"/>
+          </a:solidFill>
+          <a:ln/>
+        </p:spPr>
+      </p:sp>
+      <p:sp>
+        <p:nvSpPr>
+          <p:cNvPr id="8" name="Text 6"/>
+          <p:cNvSpPr/>
+          <p:nvPr/>
+        </p:nvSpPr>
+        <p:spPr>
+          <a:xfrm>
+            <a:off x="731520" y="3246120"/>
+            <a:ext cx="3657600" cy="320040"/>
+          </a:xfrm>
+          <a:prstGeom prst="rect">
+            <a:avLst/>
+          </a:prstGeom>
+          <a:noFill/>
+          <a:ln/>
+        </p:spPr>
+        <p:txBody>
+          <a:bodyPr wrap="square" rtlCol="0" anchor="ctr"/>
+          <a:lstStyle/>
+          <a:p>
+            <a:pPr indent="0" marL="0">
+              <a:buNone/>
+            </a:pPr>
+            <a:r>
+              <a:rPr lang="en-US" sz="1100" b="1" spc="200" kern="0" dirty="0">
+                <a:solidFill>
+                  <a:srgbClr val="E9C46A"/>
                 </a:solidFill>
                 <a:latin typeface="Calibri" pitchFamily="34" charset="0"/>
                 <a:ea typeface="Calibri" pitchFamily="34" charset="-122"/>
                 <a:cs typeface="Calibri" pitchFamily="34" charset="-120"/>
               </a:rPr>
-              <a:t>This is called the 10% rule.</a:t>
-            </a:r>
-            <a:endParaRPr lang="en-US" sz="1500" dirty="0"/>
-          </a:p>
+              <a:t>Think — Pair — Share</a:t>
+            </a:r>
+            <a:endParaRPr lang="en-US" sz="1100" dirty="0"/>
+          </a:p>
+        </p:txBody>
+      </p:sp>
+      <p:sp>
+        <p:nvSpPr>
+          <p:cNvPr id="9" name="Text 7"/>
+          <p:cNvSpPr/>
+          <p:nvPr/>
+        </p:nvSpPr>
+        <p:spPr>
+          <a:xfrm>
+            <a:off x="731520" y="3566160"/>
+            <a:ext cx="6949440" cy="1188720"/>
+          </a:xfrm>
+          <a:prstGeom prst="rect">
+            <a:avLst/>
+          </a:prstGeom>
+          <a:noFill/>
+          <a:ln/>
+        </p:spPr>
+        <p:txBody>
+          <a:bodyPr wrap="square" rtlCol="0" anchor="ctr"/>
+          <a:lstStyle/>
           <a:p>
             <a:pPr marL="342900" indent="-342900">
-              <a:lnSpc>
-                <a:spcPct val="140000"/>
-              </a:lnSpc>
+              <a:spcAft>
+                <a:spcPts val="600"/>
+              </a:spcAft>
               <a:buSzPct val="100000"/>
               <a:buChar char="•"/>
             </a:pPr>
             <a:r>
-              <a:rPr lang="en-US" sz="1500" dirty="0">
-                <a:solidFill>
-                  <a:srgbClr val="3D3A36"/>
+              <a:rPr lang="en-US" sz="1400" dirty="0">
+                <a:solidFill>
+                  <a:srgbClr val="E5E2DC"/>
                 </a:solidFill>
                 <a:latin typeface="Calibri" pitchFamily="34" charset="0"/>
                 <a:ea typeface="Calibri" pitchFamily="34" charset="-122"/>
                 <a:cs typeface="Calibri" pitchFamily="34" charset="-120"/>
               </a:rPr>
-              <a:t>This is why food chains rarely have more than 4–5 levels.</a:t>
-            </a:r>
-            <a:endParaRPr lang="en-US" sz="1500" dirty="0"/>
+              <a:t>What do organisms USE energy for?</a:t>
+            </a:r>
+            <a:endParaRPr lang="en-US" sz="1400" dirty="0"/>
+          </a:p>
+          <a:p>
+            <a:pPr marL="342900" indent="-342900">
+              <a:spcAft>
+                <a:spcPts val="600"/>
+              </a:spcAft>
+              <a:buSzPct val="100000"/>
+              <a:buChar char="•"/>
+            </a:pPr>
+            <a:r>
+              <a:rPr lang="en-US" sz="1400" dirty="0">
+                <a:solidFill>
+                  <a:srgbClr val="E5E2DC"/>
+                </a:solidFill>
+                <a:latin typeface="Calibri" pitchFamily="34" charset="0"/>
+                <a:ea typeface="Calibri" pitchFamily="34" charset="-122"/>
+                <a:cs typeface="Calibri" pitchFamily="34" charset="-120"/>
+              </a:rPr>
+              <a:t>Why does a farmer need far more rice plants than cows?</a:t>
+            </a:r>
+            <a:endParaRPr lang="en-US" sz="1400" dirty="0"/>
+          </a:p>
+          <a:p>
+            <a:pPr marL="342900" indent="-342900">
+              <a:spcAft>
+                <a:spcPts val="600"/>
+              </a:spcAft>
+              <a:buSzPct val="100000"/>
+              <a:buChar char="•"/>
+            </a:pPr>
+            <a:r>
+              <a:rPr lang="en-US" sz="1400" dirty="0">
+                <a:solidFill>
+                  <a:srgbClr val="E5E2DC"/>
+                </a:solidFill>
+                <a:latin typeface="Calibri" pitchFamily="34" charset="0"/>
+                <a:ea typeface="Calibri" pitchFamily="34" charset="-122"/>
+                <a:cs typeface="Calibri" pitchFamily="34" charset="-120"/>
+              </a:rPr>
+              <a:t>What happens to the 'lost' 90%?</a:t>
+            </a:r>
+            <a:endParaRPr lang="en-US" sz="1400" dirty="0"/>
           </a:p>
         </p:txBody>
       </p:sp>
@@ -1641,6 +2062,13 @@
 <file path=ppt/slides/slide3.xml><?xml version="1.0" encoding="utf-8"?>
 <p:sld xmlns:a="http://schemas.openxmlformats.org/drawingml/2006/main" xmlns:r="http://schemas.openxmlformats.org/officeDocument/2006/relationships" xmlns:p="http://schemas.openxmlformats.org/presentationml/2006/main">
   <p:cSld name="Slide 3">
+    <p:bg>
+      <p:bgPr>
+        <a:solidFill>
+          <a:srgbClr val="FAF8F5"/>
+        </a:solidFill>
+      </p:bgPr>
+    </p:bg>
     <p:spTree>
       <p:nvGrpSpPr>
         <p:cNvPr id="1" name=""/>
@@ -1664,13 +2092,13 @@
         <p:spPr>
           <a:xfrm>
             <a:off x="0" y="0"/>
-            <a:ext cx="9144000" cy="5143500"/>
-          </a:xfrm>
-          <a:prstGeom prst="rect">
-            <a:avLst/>
-          </a:prstGeom>
-          <a:solidFill>
-            <a:srgbClr val="FAF8F5"/>
+            <a:ext cx="9144000" cy="822960"/>
+          </a:xfrm>
+          <a:prstGeom prst="rect">
+            <a:avLst/>
+          </a:prstGeom>
+          <a:solidFill>
+            <a:srgbClr val="FFFFFF"/>
           </a:solidFill>
           <a:ln/>
         </p:spPr>
@@ -1683,14 +2111,14 @@
         </p:nvSpPr>
         <p:spPr>
           <a:xfrm>
-            <a:off x="0" y="0"/>
-            <a:ext cx="9144000" cy="54864"/>
-          </a:xfrm>
-          <a:prstGeom prst="rect">
-            <a:avLst/>
-          </a:prstGeom>
-          <a:solidFill>
-            <a:srgbClr val="1B2A4A"/>
+            <a:off x="0" y="795528"/>
+            <a:ext cx="9144000" cy="27432"/>
+          </a:xfrm>
+          <a:prstGeom prst="rect">
+            <a:avLst/>
+          </a:prstGeom>
+          <a:solidFill>
+            <a:srgbClr val="E9C46A"/>
           </a:solidFill>
           <a:ln/>
         </p:spPr>
@@ -1703,8 +2131,8 @@
         </p:nvSpPr>
         <p:spPr>
           <a:xfrm>
-            <a:off x="640080" y="320040"/>
-            <a:ext cx="7863840" cy="548640"/>
+            <a:off x="640080" y="91440"/>
+            <a:ext cx="7863840" cy="640080"/>
           </a:xfrm>
           <a:prstGeom prst="rect">
             <a:avLst/>
@@ -1720,7 +2148,7 @@
               <a:buNone/>
             </a:pPr>
             <a:r>
-              <a:rPr lang="en-US" sz="2600" b="1" dirty="0">
+              <a:rPr lang="en-US" sz="2200" b="1" dirty="0">
                 <a:solidFill>
                   <a:srgbClr val="1B2A4A"/>
                 </a:solidFill>
@@ -1728,1037 +2156,118 @@
                 <a:ea typeface="Georgia" pitchFamily="34" charset="-122"/>
                 <a:cs typeface="Georgia" pitchFamily="34" charset="-120"/>
               </a:rPr>
-              <a:t>Energy Pyramid</a:t>
-            </a:r>
-            <a:endParaRPr lang="en-US" sz="2600" dirty="0"/>
-          </a:p>
-        </p:txBody>
-      </p:sp>
-      <p:graphicFrame>
-        <p:nvGraphicFramePr>
-          <p:cNvPr id="4" name="Table 0"/>
-          <p:cNvGraphicFramePr>
-            <a:graphicFrameLocks noGrp="1"/>
-          </p:cNvGraphicFramePr>
-          <p:nvPr>
-            <p:extLst>
-              <p:ext uri="{D42A27DB-BD31-4B8C-83A1-F6EECF244321}">
-                <p14:modId xmlns:p14="http://schemas.microsoft.com/office/powerpoint/2010/main" val="1579011935"/>
-              </p:ext>
-            </p:extLst>
-          </p:nvPr>
-        </p:nvGraphicFramePr>
-        <p:xfrm>
-          <a:off x="640080" y="1051560"/>
-          <a:ext cx="7863840" cy="914400"/>
-        </p:xfrm>
-        <a:graphic>
-          <a:graphicData uri="http://schemas.openxmlformats.org/drawingml/2006/table">
-            <a:tbl>
-              <a:tblPr/>
-              <a:tblGrid>
-                <a:gridCol w="2621280"/>
-                <a:gridCol w="2621280"/>
-                <a:gridCol w="2621280"/>
-              </a:tblGrid>
-              <a:tr h="502920">
-                <a:tc>
-                  <a:txBody>
-                    <a:bodyPr/>
-                    <a:lstStyle/>
-                    <a:p>
-                      <a:pPr indent="0" marL="0">
-                        <a:buNone/>
-                      </a:pPr>
-                      <a:r>
-                        <a:rPr lang="en-US" sz="1200" b="1" dirty="0">
-                          <a:solidFill>
-                            <a:srgbClr val="FFFFFF"/>
-                          </a:solidFill>
-                          <a:latin typeface="Calibri" pitchFamily="34" charset="0"/>
-                          <a:ea typeface="Calibri" pitchFamily="34" charset="-122"/>
-                          <a:cs typeface="Calibri" pitchFamily="34" charset="-120"/>
-                        </a:rPr>
-                        <a:t>Level</a:t>
-                      </a:r>
-                      <a:endParaRPr lang="en-US" sz="1200" dirty="0">
-                        <a:latin typeface="Calibri" charset="0"/>
-                        <a:ea typeface="Calibri" charset="0"/>
-                        <a:cs typeface="Calibri" charset="0"/>
-                      </a:endParaRPr>
-                    </a:p>
-                  </a:txBody>
-                  <a:tcPr marL="91440" marR="91440" marT="45720" marB="45720">
-                    <a:lnL w="6350" cap="flat" cmpd="sng" algn="ctr">
-                      <a:solidFill>
-                        <a:srgbClr val="E5E2DC"/>
-                      </a:solidFill>
-                      <a:prstDash val="solid"/>
-                      <a:round/>
-                      <a:headEnd type="none" w="med" len="med"/>
-                      <a:tailEnd type="none" w="med" len="med"/>
-                    </a:lnL>
-                    <a:lnR w="6350" cap="flat" cmpd="sng" algn="ctr">
-                      <a:solidFill>
-                        <a:srgbClr val="E5E2DC"/>
-                      </a:solidFill>
-                      <a:prstDash val="solid"/>
-                      <a:round/>
-                      <a:headEnd type="none" w="med" len="med"/>
-                      <a:tailEnd type="none" w="med" len="med"/>
-                    </a:lnR>
-                    <a:lnT w="6350" cap="flat" cmpd="sng" algn="ctr">
-                      <a:solidFill>
-                        <a:srgbClr val="E5E2DC"/>
-                      </a:solidFill>
-                      <a:prstDash val="solid"/>
-                      <a:round/>
-                      <a:headEnd type="none" w="med" len="med"/>
-                      <a:tailEnd type="none" w="med" len="med"/>
-                    </a:lnT>
-                    <a:lnB w="6350" cap="flat" cmpd="sng" algn="ctr">
-                      <a:solidFill>
-                        <a:srgbClr val="E5E2DC"/>
-                      </a:solidFill>
-                      <a:prstDash val="solid"/>
-                      <a:round/>
-                      <a:headEnd type="none" w="med" len="med"/>
-                      <a:tailEnd type="none" w="med" len="med"/>
-                    </a:lnB>
-                    <a:solidFill>
-                      <a:srgbClr val="1B2A4A"/>
-                    </a:solidFill>
-                  </a:tcPr>
-                </a:tc>
-                <a:tc>
-                  <a:txBody>
-                    <a:bodyPr/>
-                    <a:lstStyle/>
-                    <a:p>
-                      <a:pPr indent="0" marL="0">
-                        <a:buNone/>
-                      </a:pPr>
-                      <a:r>
-                        <a:rPr lang="en-US" sz="1200" b="1" dirty="0">
-                          <a:solidFill>
-                            <a:srgbClr val="FFFFFF"/>
-                          </a:solidFill>
-                          <a:latin typeface="Calibri" pitchFamily="34" charset="0"/>
-                          <a:ea typeface="Calibri" pitchFamily="34" charset="-122"/>
-                          <a:cs typeface="Calibri" pitchFamily="34" charset="-120"/>
-                        </a:rPr>
-                        <a:t>Energy</a:t>
-                      </a:r>
-                      <a:endParaRPr lang="en-US" sz="1200" dirty="0">
-                        <a:latin typeface="Calibri" charset="0"/>
-                        <a:ea typeface="Calibri" charset="0"/>
-                        <a:cs typeface="Calibri" charset="0"/>
-                      </a:endParaRPr>
-                    </a:p>
-                  </a:txBody>
-                  <a:tcPr marL="91440" marR="91440" marT="45720" marB="45720">
-                    <a:lnL w="6350" cap="flat" cmpd="sng" algn="ctr">
-                      <a:solidFill>
-                        <a:srgbClr val="E5E2DC"/>
-                      </a:solidFill>
-                      <a:prstDash val="solid"/>
-                      <a:round/>
-                      <a:headEnd type="none" w="med" len="med"/>
-                      <a:tailEnd type="none" w="med" len="med"/>
-                    </a:lnL>
-                    <a:lnR w="6350" cap="flat" cmpd="sng" algn="ctr">
-                      <a:solidFill>
-                        <a:srgbClr val="E5E2DC"/>
-                      </a:solidFill>
-                      <a:prstDash val="solid"/>
-                      <a:round/>
-                      <a:headEnd type="none" w="med" len="med"/>
-                      <a:tailEnd type="none" w="med" len="med"/>
-                    </a:lnR>
-                    <a:lnT w="6350" cap="flat" cmpd="sng" algn="ctr">
-                      <a:solidFill>
-                        <a:srgbClr val="E5E2DC"/>
-                      </a:solidFill>
-                      <a:prstDash val="solid"/>
-                      <a:round/>
-                      <a:headEnd type="none" w="med" len="med"/>
-                      <a:tailEnd type="none" w="med" len="med"/>
-                    </a:lnT>
-                    <a:lnB w="6350" cap="flat" cmpd="sng" algn="ctr">
-                      <a:solidFill>
-                        <a:srgbClr val="E5E2DC"/>
-                      </a:solidFill>
-                      <a:prstDash val="solid"/>
-                      <a:round/>
-                      <a:headEnd type="none" w="med" len="med"/>
-                      <a:tailEnd type="none" w="med" len="med"/>
-                    </a:lnB>
-                    <a:solidFill>
-                      <a:srgbClr val="1B2A4A"/>
-                    </a:solidFill>
-                  </a:tcPr>
-                </a:tc>
-                <a:tc>
-                  <a:txBody>
-                    <a:bodyPr/>
-                    <a:lstStyle/>
-                    <a:p>
-                      <a:pPr indent="0" marL="0">
-                        <a:buNone/>
-                      </a:pPr>
-                      <a:r>
-                        <a:rPr lang="en-US" sz="1200" b="1" dirty="0">
-                          <a:solidFill>
-                            <a:srgbClr val="FFFFFF"/>
-                          </a:solidFill>
-                          <a:latin typeface="Calibri" pitchFamily="34" charset="0"/>
-                          <a:ea typeface="Calibri" pitchFamily="34" charset="-122"/>
-                          <a:cs typeface="Calibri" pitchFamily="34" charset="-120"/>
-                        </a:rPr>
-                        <a:t>Explanation</a:t>
-                      </a:r>
-                      <a:endParaRPr lang="en-US" sz="1200" dirty="0">
-                        <a:latin typeface="Calibri" charset="0"/>
-                        <a:ea typeface="Calibri" charset="0"/>
-                        <a:cs typeface="Calibri" charset="0"/>
-                      </a:endParaRPr>
-                    </a:p>
-                  </a:txBody>
-                  <a:tcPr marL="91440" marR="91440" marT="45720" marB="45720">
-                    <a:lnL w="6350" cap="flat" cmpd="sng" algn="ctr">
-                      <a:solidFill>
-                        <a:srgbClr val="E5E2DC"/>
-                      </a:solidFill>
-                      <a:prstDash val="solid"/>
-                      <a:round/>
-                      <a:headEnd type="none" w="med" len="med"/>
-                      <a:tailEnd type="none" w="med" len="med"/>
-                    </a:lnL>
-                    <a:lnR w="6350" cap="flat" cmpd="sng" algn="ctr">
-                      <a:solidFill>
-                        <a:srgbClr val="E5E2DC"/>
-                      </a:solidFill>
-                      <a:prstDash val="solid"/>
-                      <a:round/>
-                      <a:headEnd type="none" w="med" len="med"/>
-                      <a:tailEnd type="none" w="med" len="med"/>
-                    </a:lnR>
-                    <a:lnT w="6350" cap="flat" cmpd="sng" algn="ctr">
-                      <a:solidFill>
-                        <a:srgbClr val="E5E2DC"/>
-                      </a:solidFill>
-                      <a:prstDash val="solid"/>
-                      <a:round/>
-                      <a:headEnd type="none" w="med" len="med"/>
-                      <a:tailEnd type="none" w="med" len="med"/>
-                    </a:lnT>
-                    <a:lnB w="6350" cap="flat" cmpd="sng" algn="ctr">
-                      <a:solidFill>
-                        <a:srgbClr val="E5E2DC"/>
-                      </a:solidFill>
-                      <a:prstDash val="solid"/>
-                      <a:round/>
-                      <a:headEnd type="none" w="med" len="med"/>
-                      <a:tailEnd type="none" w="med" len="med"/>
-                    </a:lnB>
-                    <a:solidFill>
-                      <a:srgbClr val="1B2A4A"/>
-                    </a:solidFill>
-                  </a:tcPr>
-                </a:tc>
-              </a:tr>
-              <a:tr h="502920">
-                <a:tc>
-                  <a:txBody>
-                    <a:bodyPr/>
-                    <a:lstStyle/>
-                    <a:p>
-                      <a:pPr indent="0" marL="0">
-                        <a:buNone/>
-                      </a:pPr>
-                      <a:r>
-                        <a:rPr lang="en-US" sz="1200" dirty="0">
-                          <a:solidFill>
-                            <a:srgbClr val="3D3A36"/>
-                          </a:solidFill>
-                          <a:latin typeface="Calibri" pitchFamily="34" charset="0"/>
-                          <a:ea typeface="Calibri" pitchFamily="34" charset="-122"/>
-                          <a:cs typeface="Calibri" pitchFamily="34" charset="-120"/>
-                        </a:rPr>
-                        <a:t>Producers</a:t>
-                      </a:r>
-                      <a:endParaRPr lang="en-US" sz="1200" dirty="0">
-                        <a:latin typeface="Calibri" charset="0"/>
-                        <a:ea typeface="Calibri" charset="0"/>
-                        <a:cs typeface="Calibri" charset="0"/>
-                      </a:endParaRPr>
-                    </a:p>
-                  </a:txBody>
-                  <a:tcPr marL="91440" marR="91440" marT="45720" marB="45720">
-                    <a:lnL w="6350" cap="flat" cmpd="sng" algn="ctr">
-                      <a:solidFill>
-                        <a:srgbClr val="E5E2DC"/>
-                      </a:solidFill>
-                      <a:prstDash val="solid"/>
-                      <a:round/>
-                      <a:headEnd type="none" w="med" len="med"/>
-                      <a:tailEnd type="none" w="med" len="med"/>
-                    </a:lnL>
-                    <a:lnR w="6350" cap="flat" cmpd="sng" algn="ctr">
-                      <a:solidFill>
-                        <a:srgbClr val="E5E2DC"/>
-                      </a:solidFill>
-                      <a:prstDash val="solid"/>
-                      <a:round/>
-                      <a:headEnd type="none" w="med" len="med"/>
-                      <a:tailEnd type="none" w="med" len="med"/>
-                    </a:lnR>
-                    <a:lnT w="6350" cap="flat" cmpd="sng" algn="ctr">
-                      <a:solidFill>
-                        <a:srgbClr val="E5E2DC"/>
-                      </a:solidFill>
-                      <a:prstDash val="solid"/>
-                      <a:round/>
-                      <a:headEnd type="none" w="med" len="med"/>
-                      <a:tailEnd type="none" w="med" len="med"/>
-                    </a:lnT>
-                    <a:lnB w="6350" cap="flat" cmpd="sng" algn="ctr">
-                      <a:solidFill>
-                        <a:srgbClr val="E5E2DC"/>
-                      </a:solidFill>
-                      <a:prstDash val="solid"/>
-                      <a:round/>
-                      <a:headEnd type="none" w="med" len="med"/>
-                      <a:tailEnd type="none" w="med" len="med"/>
-                    </a:lnB>
-                  </a:tcPr>
-                </a:tc>
-                <a:tc>
-                  <a:txBody>
-                    <a:bodyPr/>
-                    <a:lstStyle/>
-                    <a:p>
-                      <a:pPr indent="0" marL="0">
-                        <a:buNone/>
-                      </a:pPr>
-                      <a:r>
-                        <a:rPr lang="en-US" sz="1200" dirty="0">
-                          <a:solidFill>
-                            <a:srgbClr val="3D3A36"/>
-                          </a:solidFill>
-                          <a:latin typeface="Calibri" pitchFamily="34" charset="0"/>
-                          <a:ea typeface="Calibri" pitchFamily="34" charset="-122"/>
-                          <a:cs typeface="Calibri" pitchFamily="34" charset="-120"/>
-                        </a:rPr>
-                        <a:t>10,000 kJ</a:t>
-                      </a:r>
-                      <a:endParaRPr lang="en-US" sz="1200" dirty="0">
-                        <a:latin typeface="Calibri" charset="0"/>
-                        <a:ea typeface="Calibri" charset="0"/>
-                        <a:cs typeface="Calibri" charset="0"/>
-                      </a:endParaRPr>
-                    </a:p>
-                  </a:txBody>
-                  <a:tcPr marL="91440" marR="91440" marT="45720" marB="45720">
-                    <a:lnL w="6350" cap="flat" cmpd="sng" algn="ctr">
-                      <a:solidFill>
-                        <a:srgbClr val="E5E2DC"/>
-                      </a:solidFill>
-                      <a:prstDash val="solid"/>
-                      <a:round/>
-                      <a:headEnd type="none" w="med" len="med"/>
-                      <a:tailEnd type="none" w="med" len="med"/>
-                    </a:lnL>
-                    <a:lnR w="6350" cap="flat" cmpd="sng" algn="ctr">
-                      <a:solidFill>
-                        <a:srgbClr val="E5E2DC"/>
-                      </a:solidFill>
-                      <a:prstDash val="solid"/>
-                      <a:round/>
-                      <a:headEnd type="none" w="med" len="med"/>
-                      <a:tailEnd type="none" w="med" len="med"/>
-                    </a:lnR>
-                    <a:lnT w="6350" cap="flat" cmpd="sng" algn="ctr">
-                      <a:solidFill>
-                        <a:srgbClr val="E5E2DC"/>
-                      </a:solidFill>
-                      <a:prstDash val="solid"/>
-                      <a:round/>
-                      <a:headEnd type="none" w="med" len="med"/>
-                      <a:tailEnd type="none" w="med" len="med"/>
-                    </a:lnT>
-                    <a:lnB w="6350" cap="flat" cmpd="sng" algn="ctr">
-                      <a:solidFill>
-                        <a:srgbClr val="E5E2DC"/>
-                      </a:solidFill>
-                      <a:prstDash val="solid"/>
-                      <a:round/>
-                      <a:headEnd type="none" w="med" len="med"/>
-                      <a:tailEnd type="none" w="med" len="med"/>
-                    </a:lnB>
-                  </a:tcPr>
-                </a:tc>
-                <a:tc>
-                  <a:txBody>
-                    <a:bodyPr/>
-                    <a:lstStyle/>
-                    <a:p>
-                      <a:pPr indent="0" marL="0">
-                        <a:buNone/>
-                      </a:pPr>
-                      <a:r>
-                        <a:rPr lang="en-US" sz="1200" dirty="0">
-                          <a:solidFill>
-                            <a:srgbClr val="3D3A36"/>
-                          </a:solidFill>
-                          <a:latin typeface="Calibri" pitchFamily="34" charset="0"/>
-                          <a:ea typeface="Calibri" pitchFamily="34" charset="-122"/>
-                          <a:cs typeface="Calibri" pitchFamily="34" charset="-120"/>
-                        </a:rPr>
-                        <a:t>Energy captured from sunlight</a:t>
-                      </a:r>
-                      <a:endParaRPr lang="en-US" sz="1200" dirty="0">
-                        <a:latin typeface="Calibri" charset="0"/>
-                        <a:ea typeface="Calibri" charset="0"/>
-                        <a:cs typeface="Calibri" charset="0"/>
-                      </a:endParaRPr>
-                    </a:p>
-                  </a:txBody>
-                  <a:tcPr marL="91440" marR="91440" marT="45720" marB="45720">
-                    <a:lnL w="6350" cap="flat" cmpd="sng" algn="ctr">
-                      <a:solidFill>
-                        <a:srgbClr val="E5E2DC"/>
-                      </a:solidFill>
-                      <a:prstDash val="solid"/>
-                      <a:round/>
-                      <a:headEnd type="none" w="med" len="med"/>
-                      <a:tailEnd type="none" w="med" len="med"/>
-                    </a:lnL>
-                    <a:lnR w="6350" cap="flat" cmpd="sng" algn="ctr">
-                      <a:solidFill>
-                        <a:srgbClr val="E5E2DC"/>
-                      </a:solidFill>
-                      <a:prstDash val="solid"/>
-                      <a:round/>
-                      <a:headEnd type="none" w="med" len="med"/>
-                      <a:tailEnd type="none" w="med" len="med"/>
-                    </a:lnR>
-                    <a:lnT w="6350" cap="flat" cmpd="sng" algn="ctr">
-                      <a:solidFill>
-                        <a:srgbClr val="E5E2DC"/>
-                      </a:solidFill>
-                      <a:prstDash val="solid"/>
-                      <a:round/>
-                      <a:headEnd type="none" w="med" len="med"/>
-                      <a:tailEnd type="none" w="med" len="med"/>
-                    </a:lnT>
-                    <a:lnB w="6350" cap="flat" cmpd="sng" algn="ctr">
-                      <a:solidFill>
-                        <a:srgbClr val="E5E2DC"/>
-                      </a:solidFill>
-                      <a:prstDash val="solid"/>
-                      <a:round/>
-                      <a:headEnd type="none" w="med" len="med"/>
-                      <a:tailEnd type="none" w="med" len="med"/>
-                    </a:lnB>
-                  </a:tcPr>
-                </a:tc>
-              </a:tr>
-              <a:tr h="502920">
-                <a:tc>
-                  <a:txBody>
-                    <a:bodyPr/>
-                    <a:lstStyle/>
-                    <a:p>
-                      <a:pPr indent="0" marL="0">
-                        <a:buNone/>
-                      </a:pPr>
-                      <a:r>
-                        <a:rPr lang="en-US" sz="1200" dirty="0">
-                          <a:solidFill>
-                            <a:srgbClr val="3D3A36"/>
-                          </a:solidFill>
-                          <a:latin typeface="Calibri" pitchFamily="34" charset="0"/>
-                          <a:ea typeface="Calibri" pitchFamily="34" charset="-122"/>
-                          <a:cs typeface="Calibri" pitchFamily="34" charset="-120"/>
-                        </a:rPr>
-                        <a:t>Primary consumers</a:t>
-                      </a:r>
-                      <a:endParaRPr lang="en-US" sz="1200" dirty="0">
-                        <a:latin typeface="Calibri" charset="0"/>
-                        <a:ea typeface="Calibri" charset="0"/>
-                        <a:cs typeface="Calibri" charset="0"/>
-                      </a:endParaRPr>
-                    </a:p>
-                  </a:txBody>
-                  <a:tcPr marL="91440" marR="91440" marT="45720" marB="45720">
-                    <a:lnL w="6350" cap="flat" cmpd="sng" algn="ctr">
-                      <a:solidFill>
-                        <a:srgbClr val="E5E2DC"/>
-                      </a:solidFill>
-                      <a:prstDash val="solid"/>
-                      <a:round/>
-                      <a:headEnd type="none" w="med" len="med"/>
-                      <a:tailEnd type="none" w="med" len="med"/>
-                    </a:lnL>
-                    <a:lnR w="6350" cap="flat" cmpd="sng" algn="ctr">
-                      <a:solidFill>
-                        <a:srgbClr val="E5E2DC"/>
-                      </a:solidFill>
-                      <a:prstDash val="solid"/>
-                      <a:round/>
-                      <a:headEnd type="none" w="med" len="med"/>
-                      <a:tailEnd type="none" w="med" len="med"/>
-                    </a:lnR>
-                    <a:lnT w="6350" cap="flat" cmpd="sng" algn="ctr">
-                      <a:solidFill>
-                        <a:srgbClr val="E5E2DC"/>
-                      </a:solidFill>
-                      <a:prstDash val="solid"/>
-                      <a:round/>
-                      <a:headEnd type="none" w="med" len="med"/>
-                      <a:tailEnd type="none" w="med" len="med"/>
-                    </a:lnT>
-                    <a:lnB w="6350" cap="flat" cmpd="sng" algn="ctr">
-                      <a:solidFill>
-                        <a:srgbClr val="E5E2DC"/>
-                      </a:solidFill>
-                      <a:prstDash val="solid"/>
-                      <a:round/>
-                      <a:headEnd type="none" w="med" len="med"/>
-                      <a:tailEnd type="none" w="med" len="med"/>
-                    </a:lnB>
-                  </a:tcPr>
-                </a:tc>
-                <a:tc>
-                  <a:txBody>
-                    <a:bodyPr/>
-                    <a:lstStyle/>
-                    <a:p>
-                      <a:pPr indent="0" marL="0">
-                        <a:buNone/>
-                      </a:pPr>
-                      <a:r>
-                        <a:rPr lang="en-US" sz="1200" dirty="0">
-                          <a:solidFill>
-                            <a:srgbClr val="3D3A36"/>
-                          </a:solidFill>
-                          <a:latin typeface="Calibri" pitchFamily="34" charset="0"/>
-                          <a:ea typeface="Calibri" pitchFamily="34" charset="-122"/>
-                          <a:cs typeface="Calibri" pitchFamily="34" charset="-120"/>
-                        </a:rPr>
-                        <a:t>1,000 kJ</a:t>
-                      </a:r>
-                      <a:endParaRPr lang="en-US" sz="1200" dirty="0">
-                        <a:latin typeface="Calibri" charset="0"/>
-                        <a:ea typeface="Calibri" charset="0"/>
-                        <a:cs typeface="Calibri" charset="0"/>
-                      </a:endParaRPr>
-                    </a:p>
-                  </a:txBody>
-                  <a:tcPr marL="91440" marR="91440" marT="45720" marB="45720">
-                    <a:lnL w="6350" cap="flat" cmpd="sng" algn="ctr">
-                      <a:solidFill>
-                        <a:srgbClr val="E5E2DC"/>
-                      </a:solidFill>
-                      <a:prstDash val="solid"/>
-                      <a:round/>
-                      <a:headEnd type="none" w="med" len="med"/>
-                      <a:tailEnd type="none" w="med" len="med"/>
-                    </a:lnL>
-                    <a:lnR w="6350" cap="flat" cmpd="sng" algn="ctr">
-                      <a:solidFill>
-                        <a:srgbClr val="E5E2DC"/>
-                      </a:solidFill>
-                      <a:prstDash val="solid"/>
-                      <a:round/>
-                      <a:headEnd type="none" w="med" len="med"/>
-                      <a:tailEnd type="none" w="med" len="med"/>
-                    </a:lnR>
-                    <a:lnT w="6350" cap="flat" cmpd="sng" algn="ctr">
-                      <a:solidFill>
-                        <a:srgbClr val="E5E2DC"/>
-                      </a:solidFill>
-                      <a:prstDash val="solid"/>
-                      <a:round/>
-                      <a:headEnd type="none" w="med" len="med"/>
-                      <a:tailEnd type="none" w="med" len="med"/>
-                    </a:lnT>
-                    <a:lnB w="6350" cap="flat" cmpd="sng" algn="ctr">
-                      <a:solidFill>
-                        <a:srgbClr val="E5E2DC"/>
-                      </a:solidFill>
-                      <a:prstDash val="solid"/>
-                      <a:round/>
-                      <a:headEnd type="none" w="med" len="med"/>
-                      <a:tailEnd type="none" w="med" len="med"/>
-                    </a:lnB>
-                  </a:tcPr>
-                </a:tc>
-                <a:tc>
-                  <a:txBody>
-                    <a:bodyPr/>
-                    <a:lstStyle/>
-                    <a:p>
-                      <a:pPr indent="0" marL="0">
-                        <a:buNone/>
-                      </a:pPr>
-                      <a:r>
-                        <a:rPr lang="en-US" sz="1200" dirty="0">
-                          <a:solidFill>
-                            <a:srgbClr val="3D3A36"/>
-                          </a:solidFill>
-                          <a:latin typeface="Calibri" pitchFamily="34" charset="0"/>
-                          <a:ea typeface="Calibri" pitchFamily="34" charset="-122"/>
-                          <a:cs typeface="Calibri" pitchFamily="34" charset="-120"/>
-                        </a:rPr>
-                        <a:t>10% of producer energy</a:t>
-                      </a:r>
-                      <a:endParaRPr lang="en-US" sz="1200" dirty="0">
-                        <a:latin typeface="Calibri" charset="0"/>
-                        <a:ea typeface="Calibri" charset="0"/>
-                        <a:cs typeface="Calibri" charset="0"/>
-                      </a:endParaRPr>
-                    </a:p>
-                  </a:txBody>
-                  <a:tcPr marL="91440" marR="91440" marT="45720" marB="45720">
-                    <a:lnL w="6350" cap="flat" cmpd="sng" algn="ctr">
-                      <a:solidFill>
-                        <a:srgbClr val="E5E2DC"/>
-                      </a:solidFill>
-                      <a:prstDash val="solid"/>
-                      <a:round/>
-                      <a:headEnd type="none" w="med" len="med"/>
-                      <a:tailEnd type="none" w="med" len="med"/>
-                    </a:lnL>
-                    <a:lnR w="6350" cap="flat" cmpd="sng" algn="ctr">
-                      <a:solidFill>
-                        <a:srgbClr val="E5E2DC"/>
-                      </a:solidFill>
-                      <a:prstDash val="solid"/>
-                      <a:round/>
-                      <a:headEnd type="none" w="med" len="med"/>
-                      <a:tailEnd type="none" w="med" len="med"/>
-                    </a:lnR>
-                    <a:lnT w="6350" cap="flat" cmpd="sng" algn="ctr">
-                      <a:solidFill>
-                        <a:srgbClr val="E5E2DC"/>
-                      </a:solidFill>
-                      <a:prstDash val="solid"/>
-                      <a:round/>
-                      <a:headEnd type="none" w="med" len="med"/>
-                      <a:tailEnd type="none" w="med" len="med"/>
-                    </a:lnT>
-                    <a:lnB w="6350" cap="flat" cmpd="sng" algn="ctr">
-                      <a:solidFill>
-                        <a:srgbClr val="E5E2DC"/>
-                      </a:solidFill>
-                      <a:prstDash val="solid"/>
-                      <a:round/>
-                      <a:headEnd type="none" w="med" len="med"/>
-                      <a:tailEnd type="none" w="med" len="med"/>
-                    </a:lnB>
-                  </a:tcPr>
-                </a:tc>
-              </a:tr>
-              <a:tr h="502920">
-                <a:tc>
-                  <a:txBody>
-                    <a:bodyPr/>
-                    <a:lstStyle/>
-                    <a:p>
-                      <a:pPr indent="0" marL="0">
-                        <a:buNone/>
-                      </a:pPr>
-                      <a:r>
-                        <a:rPr lang="en-US" sz="1200" dirty="0">
-                          <a:solidFill>
-                            <a:srgbClr val="3D3A36"/>
-                          </a:solidFill>
-                          <a:latin typeface="Calibri" pitchFamily="34" charset="0"/>
-                          <a:ea typeface="Calibri" pitchFamily="34" charset="-122"/>
-                          <a:cs typeface="Calibri" pitchFamily="34" charset="-120"/>
-                        </a:rPr>
-                        <a:t>Secondary consumers</a:t>
-                      </a:r>
-                      <a:endParaRPr lang="en-US" sz="1200" dirty="0">
-                        <a:latin typeface="Calibri" charset="0"/>
-                        <a:ea typeface="Calibri" charset="0"/>
-                        <a:cs typeface="Calibri" charset="0"/>
-                      </a:endParaRPr>
-                    </a:p>
-                  </a:txBody>
-                  <a:tcPr marL="91440" marR="91440" marT="45720" marB="45720">
-                    <a:lnL w="6350" cap="flat" cmpd="sng" algn="ctr">
-                      <a:solidFill>
-                        <a:srgbClr val="E5E2DC"/>
-                      </a:solidFill>
-                      <a:prstDash val="solid"/>
-                      <a:round/>
-                      <a:headEnd type="none" w="med" len="med"/>
-                      <a:tailEnd type="none" w="med" len="med"/>
-                    </a:lnL>
-                    <a:lnR w="6350" cap="flat" cmpd="sng" algn="ctr">
-                      <a:solidFill>
-                        <a:srgbClr val="E5E2DC"/>
-                      </a:solidFill>
-                      <a:prstDash val="solid"/>
-                      <a:round/>
-                      <a:headEnd type="none" w="med" len="med"/>
-                      <a:tailEnd type="none" w="med" len="med"/>
-                    </a:lnR>
-                    <a:lnT w="6350" cap="flat" cmpd="sng" algn="ctr">
-                      <a:solidFill>
-                        <a:srgbClr val="E5E2DC"/>
-                      </a:solidFill>
-                      <a:prstDash val="solid"/>
-                      <a:round/>
-                      <a:headEnd type="none" w="med" len="med"/>
-                      <a:tailEnd type="none" w="med" len="med"/>
-                    </a:lnT>
-                    <a:lnB w="6350" cap="flat" cmpd="sng" algn="ctr">
-                      <a:solidFill>
-                        <a:srgbClr val="E5E2DC"/>
-                      </a:solidFill>
-                      <a:prstDash val="solid"/>
-                      <a:round/>
-                      <a:headEnd type="none" w="med" len="med"/>
-                      <a:tailEnd type="none" w="med" len="med"/>
-                    </a:lnB>
-                  </a:tcPr>
-                </a:tc>
-                <a:tc>
-                  <a:txBody>
-                    <a:bodyPr/>
-                    <a:lstStyle/>
-                    <a:p>
-                      <a:pPr indent="0" marL="0">
-                        <a:buNone/>
-                      </a:pPr>
-                      <a:r>
-                        <a:rPr lang="en-US" sz="1200" dirty="0">
-                          <a:solidFill>
-                            <a:srgbClr val="3D3A36"/>
-                          </a:solidFill>
-                          <a:latin typeface="Calibri" pitchFamily="34" charset="0"/>
-                          <a:ea typeface="Calibri" pitchFamily="34" charset="-122"/>
-                          <a:cs typeface="Calibri" pitchFamily="34" charset="-120"/>
-                        </a:rPr>
-                        <a:t>100 kJ</a:t>
-                      </a:r>
-                      <a:endParaRPr lang="en-US" sz="1200" dirty="0">
-                        <a:latin typeface="Calibri" charset="0"/>
-                        <a:ea typeface="Calibri" charset="0"/>
-                        <a:cs typeface="Calibri" charset="0"/>
-                      </a:endParaRPr>
-                    </a:p>
-                  </a:txBody>
-                  <a:tcPr marL="91440" marR="91440" marT="45720" marB="45720">
-                    <a:lnL w="6350" cap="flat" cmpd="sng" algn="ctr">
-                      <a:solidFill>
-                        <a:srgbClr val="E5E2DC"/>
-                      </a:solidFill>
-                      <a:prstDash val="solid"/>
-                      <a:round/>
-                      <a:headEnd type="none" w="med" len="med"/>
-                      <a:tailEnd type="none" w="med" len="med"/>
-                    </a:lnL>
-                    <a:lnR w="6350" cap="flat" cmpd="sng" algn="ctr">
-                      <a:solidFill>
-                        <a:srgbClr val="E5E2DC"/>
-                      </a:solidFill>
-                      <a:prstDash val="solid"/>
-                      <a:round/>
-                      <a:headEnd type="none" w="med" len="med"/>
-                      <a:tailEnd type="none" w="med" len="med"/>
-                    </a:lnR>
-                    <a:lnT w="6350" cap="flat" cmpd="sng" algn="ctr">
-                      <a:solidFill>
-                        <a:srgbClr val="E5E2DC"/>
-                      </a:solidFill>
-                      <a:prstDash val="solid"/>
-                      <a:round/>
-                      <a:headEnd type="none" w="med" len="med"/>
-                      <a:tailEnd type="none" w="med" len="med"/>
-                    </a:lnT>
-                    <a:lnB w="6350" cap="flat" cmpd="sng" algn="ctr">
-                      <a:solidFill>
-                        <a:srgbClr val="E5E2DC"/>
-                      </a:solidFill>
-                      <a:prstDash val="solid"/>
-                      <a:round/>
-                      <a:headEnd type="none" w="med" len="med"/>
-                      <a:tailEnd type="none" w="med" len="med"/>
-                    </a:lnB>
-                  </a:tcPr>
-                </a:tc>
-                <a:tc>
-                  <a:txBody>
-                    <a:bodyPr/>
-                    <a:lstStyle/>
-                    <a:p>
-                      <a:pPr indent="0" marL="0">
-                        <a:buNone/>
-                      </a:pPr>
-                      <a:r>
-                        <a:rPr lang="en-US" sz="1200" dirty="0">
-                          <a:solidFill>
-                            <a:srgbClr val="3D3A36"/>
-                          </a:solidFill>
-                          <a:latin typeface="Calibri" pitchFamily="34" charset="0"/>
-                          <a:ea typeface="Calibri" pitchFamily="34" charset="-122"/>
-                          <a:cs typeface="Calibri" pitchFamily="34" charset="-120"/>
-                        </a:rPr>
-                        <a:t>10% of primary energy</a:t>
-                      </a:r>
-                      <a:endParaRPr lang="en-US" sz="1200" dirty="0">
-                        <a:latin typeface="Calibri" charset="0"/>
-                        <a:ea typeface="Calibri" charset="0"/>
-                        <a:cs typeface="Calibri" charset="0"/>
-                      </a:endParaRPr>
-                    </a:p>
-                  </a:txBody>
-                  <a:tcPr marL="91440" marR="91440" marT="45720" marB="45720">
-                    <a:lnL w="6350" cap="flat" cmpd="sng" algn="ctr">
-                      <a:solidFill>
-                        <a:srgbClr val="E5E2DC"/>
-                      </a:solidFill>
-                      <a:prstDash val="solid"/>
-                      <a:round/>
-                      <a:headEnd type="none" w="med" len="med"/>
-                      <a:tailEnd type="none" w="med" len="med"/>
-                    </a:lnL>
-                    <a:lnR w="6350" cap="flat" cmpd="sng" algn="ctr">
-                      <a:solidFill>
-                        <a:srgbClr val="E5E2DC"/>
-                      </a:solidFill>
-                      <a:prstDash val="solid"/>
-                      <a:round/>
-                      <a:headEnd type="none" w="med" len="med"/>
-                      <a:tailEnd type="none" w="med" len="med"/>
-                    </a:lnR>
-                    <a:lnT w="6350" cap="flat" cmpd="sng" algn="ctr">
-                      <a:solidFill>
-                        <a:srgbClr val="E5E2DC"/>
-                      </a:solidFill>
-                      <a:prstDash val="solid"/>
-                      <a:round/>
-                      <a:headEnd type="none" w="med" len="med"/>
-                      <a:tailEnd type="none" w="med" len="med"/>
-                    </a:lnT>
-                    <a:lnB w="6350" cap="flat" cmpd="sng" algn="ctr">
-                      <a:solidFill>
-                        <a:srgbClr val="E5E2DC"/>
-                      </a:solidFill>
-                      <a:prstDash val="solid"/>
-                      <a:round/>
-                      <a:headEnd type="none" w="med" len="med"/>
-                      <a:tailEnd type="none" w="med" len="med"/>
-                    </a:lnB>
-                  </a:tcPr>
-                </a:tc>
-              </a:tr>
-              <a:tr h="502920">
-                <a:tc>
-                  <a:txBody>
-                    <a:bodyPr/>
-                    <a:lstStyle/>
-                    <a:p>
-                      <a:pPr indent="0" marL="0">
-                        <a:buNone/>
-                      </a:pPr>
-                      <a:r>
-                        <a:rPr lang="en-US" sz="1200" dirty="0">
-                          <a:solidFill>
-                            <a:srgbClr val="3D3A36"/>
-                          </a:solidFill>
-                          <a:latin typeface="Calibri" pitchFamily="34" charset="0"/>
-                          <a:ea typeface="Calibri" pitchFamily="34" charset="-122"/>
-                          <a:cs typeface="Calibri" pitchFamily="34" charset="-120"/>
-                        </a:rPr>
-                        <a:t>Tertiary consumers</a:t>
-                      </a:r>
-                      <a:endParaRPr lang="en-US" sz="1200" dirty="0">
-                        <a:latin typeface="Calibri" charset="0"/>
-                        <a:ea typeface="Calibri" charset="0"/>
-                        <a:cs typeface="Calibri" charset="0"/>
-                      </a:endParaRPr>
-                    </a:p>
-                  </a:txBody>
-                  <a:tcPr marL="91440" marR="91440" marT="45720" marB="45720">
-                    <a:lnL w="6350" cap="flat" cmpd="sng" algn="ctr">
-                      <a:solidFill>
-                        <a:srgbClr val="E5E2DC"/>
-                      </a:solidFill>
-                      <a:prstDash val="solid"/>
-                      <a:round/>
-                      <a:headEnd type="none" w="med" len="med"/>
-                      <a:tailEnd type="none" w="med" len="med"/>
-                    </a:lnL>
-                    <a:lnR w="6350" cap="flat" cmpd="sng" algn="ctr">
-                      <a:solidFill>
-                        <a:srgbClr val="E5E2DC"/>
-                      </a:solidFill>
-                      <a:prstDash val="solid"/>
-                      <a:round/>
-                      <a:headEnd type="none" w="med" len="med"/>
-                      <a:tailEnd type="none" w="med" len="med"/>
-                    </a:lnR>
-                    <a:lnT w="6350" cap="flat" cmpd="sng" algn="ctr">
-                      <a:solidFill>
-                        <a:srgbClr val="E5E2DC"/>
-                      </a:solidFill>
-                      <a:prstDash val="solid"/>
-                      <a:round/>
-                      <a:headEnd type="none" w="med" len="med"/>
-                      <a:tailEnd type="none" w="med" len="med"/>
-                    </a:lnT>
-                    <a:lnB w="6350" cap="flat" cmpd="sng" algn="ctr">
-                      <a:solidFill>
-                        <a:srgbClr val="E5E2DC"/>
-                      </a:solidFill>
-                      <a:prstDash val="solid"/>
-                      <a:round/>
-                      <a:headEnd type="none" w="med" len="med"/>
-                      <a:tailEnd type="none" w="med" len="med"/>
-                    </a:lnB>
-                  </a:tcPr>
-                </a:tc>
-                <a:tc>
-                  <a:txBody>
-                    <a:bodyPr/>
-                    <a:lstStyle/>
-                    <a:p>
-                      <a:pPr indent="0" marL="0">
-                        <a:buNone/>
-                      </a:pPr>
-                      <a:r>
-                        <a:rPr lang="en-US" sz="1200" dirty="0">
-                          <a:solidFill>
-                            <a:srgbClr val="3D3A36"/>
-                          </a:solidFill>
-                          <a:latin typeface="Calibri" pitchFamily="34" charset="0"/>
-                          <a:ea typeface="Calibri" pitchFamily="34" charset="-122"/>
-                          <a:cs typeface="Calibri" pitchFamily="34" charset="-120"/>
-                        </a:rPr>
-                        <a:t>10 kJ</a:t>
-                      </a:r>
-                      <a:endParaRPr lang="en-US" sz="1200" dirty="0">
-                        <a:latin typeface="Calibri" charset="0"/>
-                        <a:ea typeface="Calibri" charset="0"/>
-                        <a:cs typeface="Calibri" charset="0"/>
-                      </a:endParaRPr>
-                    </a:p>
-                  </a:txBody>
-                  <a:tcPr marL="91440" marR="91440" marT="45720" marB="45720">
-                    <a:lnL w="6350" cap="flat" cmpd="sng" algn="ctr">
-                      <a:solidFill>
-                        <a:srgbClr val="E5E2DC"/>
-                      </a:solidFill>
-                      <a:prstDash val="solid"/>
-                      <a:round/>
-                      <a:headEnd type="none" w="med" len="med"/>
-                      <a:tailEnd type="none" w="med" len="med"/>
-                    </a:lnL>
-                    <a:lnR w="6350" cap="flat" cmpd="sng" algn="ctr">
-                      <a:solidFill>
-                        <a:srgbClr val="E5E2DC"/>
-                      </a:solidFill>
-                      <a:prstDash val="solid"/>
-                      <a:round/>
-                      <a:headEnd type="none" w="med" len="med"/>
-                      <a:tailEnd type="none" w="med" len="med"/>
-                    </a:lnR>
-                    <a:lnT w="6350" cap="flat" cmpd="sng" algn="ctr">
-                      <a:solidFill>
-                        <a:srgbClr val="E5E2DC"/>
-                      </a:solidFill>
-                      <a:prstDash val="solid"/>
-                      <a:round/>
-                      <a:headEnd type="none" w="med" len="med"/>
-                      <a:tailEnd type="none" w="med" len="med"/>
-                    </a:lnT>
-                    <a:lnB w="6350" cap="flat" cmpd="sng" algn="ctr">
-                      <a:solidFill>
-                        <a:srgbClr val="E5E2DC"/>
-                      </a:solidFill>
-                      <a:prstDash val="solid"/>
-                      <a:round/>
-                      <a:headEnd type="none" w="med" len="med"/>
-                      <a:tailEnd type="none" w="med" len="med"/>
-                    </a:lnB>
-                  </a:tcPr>
-                </a:tc>
-                <a:tc>
-                  <a:txBody>
-                    <a:bodyPr/>
-                    <a:lstStyle/>
-                    <a:p>
-                      <a:pPr indent="0" marL="0">
-                        <a:buNone/>
-                      </a:pPr>
-                      <a:r>
-                        <a:rPr lang="en-US" sz="1200" dirty="0">
-                          <a:solidFill>
-                            <a:srgbClr val="3D3A36"/>
-                          </a:solidFill>
-                          <a:latin typeface="Calibri" pitchFamily="34" charset="0"/>
-                          <a:ea typeface="Calibri" pitchFamily="34" charset="-122"/>
-                          <a:cs typeface="Calibri" pitchFamily="34" charset="-120"/>
-                        </a:rPr>
-                        <a:t>10% of secondary energy</a:t>
-                      </a:r>
-                      <a:endParaRPr lang="en-US" sz="1200" dirty="0">
-                        <a:latin typeface="Calibri" charset="0"/>
-                        <a:ea typeface="Calibri" charset="0"/>
-                        <a:cs typeface="Calibri" charset="0"/>
-                      </a:endParaRPr>
-                    </a:p>
-                  </a:txBody>
-                  <a:tcPr marL="91440" marR="91440" marT="45720" marB="45720">
-                    <a:lnL w="6350" cap="flat" cmpd="sng" algn="ctr">
-                      <a:solidFill>
-                        <a:srgbClr val="E5E2DC"/>
-                      </a:solidFill>
-                      <a:prstDash val="solid"/>
-                      <a:round/>
-                      <a:headEnd type="none" w="med" len="med"/>
-                      <a:tailEnd type="none" w="med" len="med"/>
-                    </a:lnL>
-                    <a:lnR w="6350" cap="flat" cmpd="sng" algn="ctr">
-                      <a:solidFill>
-                        <a:srgbClr val="E5E2DC"/>
-                      </a:solidFill>
-                      <a:prstDash val="solid"/>
-                      <a:round/>
-                      <a:headEnd type="none" w="med" len="med"/>
-                      <a:tailEnd type="none" w="med" len="med"/>
-                    </a:lnR>
-                    <a:lnT w="6350" cap="flat" cmpd="sng" algn="ctr">
-                      <a:solidFill>
-                        <a:srgbClr val="E5E2DC"/>
-                      </a:solidFill>
-                      <a:prstDash val="solid"/>
-                      <a:round/>
-                      <a:headEnd type="none" w="med" len="med"/>
-                      <a:tailEnd type="none" w="med" len="med"/>
-                    </a:lnT>
-                    <a:lnB w="6350" cap="flat" cmpd="sng" algn="ctr">
-                      <a:solidFill>
-                        <a:srgbClr val="E5E2DC"/>
-                      </a:solidFill>
-                      <a:prstDash val="solid"/>
-                      <a:round/>
-                      <a:headEnd type="none" w="med" len="med"/>
-                      <a:tailEnd type="none" w="med" len="med"/>
-                    </a:lnB>
-                  </a:tcPr>
-                </a:tc>
-              </a:tr>
-            </a:tbl>
-          </a:graphicData>
-        </a:graphic>
-      </p:graphicFrame>
+              <a:t>The Sun Powers Everything</a:t>
+            </a:r>
+            <a:endParaRPr lang="en-US" sz="2200" dirty="0"/>
+          </a:p>
+        </p:txBody>
+      </p:sp>
+      <p:sp>
+        <p:nvSpPr>
+          <p:cNvPr id="5" name="Text 3"/>
+          <p:cNvSpPr/>
+          <p:nvPr/>
+        </p:nvSpPr>
+        <p:spPr>
+          <a:xfrm>
+            <a:off x="640080" y="1005840"/>
+            <a:ext cx="7863840" cy="2926080"/>
+          </a:xfrm>
+          <a:prstGeom prst="rect">
+            <a:avLst/>
+          </a:prstGeom>
+          <a:noFill/>
+          <a:ln/>
+        </p:spPr>
+        <p:txBody>
+          <a:bodyPr wrap="square" rtlCol="0" anchor="ctr"/>
+          <a:lstStyle/>
+          <a:p>
+            <a:pPr marL="342900" indent="-342900">
+              <a:spcAft>
+                <a:spcPts val="800"/>
+              </a:spcAft>
+              <a:buSzPct val="100000"/>
+              <a:buChar char="•"/>
+            </a:pPr>
+            <a:r>
+              <a:rPr lang="en-US" sz="1600" dirty="0">
+                <a:solidFill>
+                  <a:srgbClr val="3D3A36"/>
+                </a:solidFill>
+                <a:latin typeface="Calibri" pitchFamily="34" charset="0"/>
+                <a:ea typeface="Calibri" pitchFamily="34" charset="-122"/>
+                <a:cs typeface="Calibri" pitchFamily="34" charset="-120"/>
+              </a:rPr>
+              <a:t>Almost all energy comes from the Sun.</a:t>
+            </a:r>
+            <a:endParaRPr lang="en-US" sz="1600" dirty="0"/>
+          </a:p>
+          <a:p>
+            <a:pPr marL="342900" indent="-342900">
+              <a:spcAft>
+                <a:spcPts val="800"/>
+              </a:spcAft>
+              <a:buSzPct val="100000"/>
+              <a:buChar char="•"/>
+            </a:pPr>
+            <a:r>
+              <a:rPr lang="en-US" sz="1600" dirty="0">
+                <a:solidFill>
+                  <a:srgbClr val="3D3A36"/>
+                </a:solidFill>
+                <a:latin typeface="Calibri" pitchFamily="34" charset="0"/>
+                <a:ea typeface="Calibri" pitchFamily="34" charset="-122"/>
+                <a:cs typeface="Calibri" pitchFamily="34" charset="-120"/>
+              </a:rPr>
+              <a:t>Producers capture sunlight through photosynthesis.</a:t>
+            </a:r>
+            <a:endParaRPr lang="en-US" sz="1600" dirty="0"/>
+          </a:p>
+          <a:p>
+            <a:pPr marL="342900" indent="-342900">
+              <a:spcAft>
+                <a:spcPts val="800"/>
+              </a:spcAft>
+              <a:buSzPct val="100000"/>
+              <a:buChar char="•"/>
+            </a:pPr>
+            <a:r>
+              <a:rPr lang="en-US" sz="1600" dirty="0">
+                <a:solidFill>
+                  <a:srgbClr val="3D3A36"/>
+                </a:solidFill>
+                <a:latin typeface="Calibri" pitchFamily="34" charset="0"/>
+                <a:ea typeface="Calibri" pitchFamily="34" charset="-122"/>
+                <a:cs typeface="Calibri" pitchFamily="34" charset="-120"/>
+              </a:rPr>
+              <a:t>Light energy → chemical energy (glucose).</a:t>
+            </a:r>
+            <a:endParaRPr lang="en-US" sz="1600" dirty="0"/>
+          </a:p>
+          <a:p>
+            <a:pPr marL="342900" indent="-342900">
+              <a:spcAft>
+                <a:spcPts val="800"/>
+              </a:spcAft>
+              <a:buSzPct val="100000"/>
+              <a:buChar char="•"/>
+            </a:pPr>
+            <a:r>
+              <a:rPr lang="en-US" sz="1600" dirty="0">
+                <a:solidFill>
+                  <a:srgbClr val="3D3A36"/>
+                </a:solidFill>
+                <a:latin typeface="Calibri" pitchFamily="34" charset="0"/>
+                <a:ea typeface="Calibri" pitchFamily="34" charset="-122"/>
+                <a:cs typeface="Calibri" pitchFamily="34" charset="-120"/>
+              </a:rPr>
+              <a:t>Chemical energy is passed through the food chain.</a:t>
+            </a:r>
+            <a:endParaRPr lang="en-US" sz="1600" dirty="0"/>
+          </a:p>
+        </p:txBody>
+      </p:sp>
     </p:spTree>
   </p:cSld>
   <p:clrMapOvr>
@@ -2813,7 +2322,7 @@
         <p:spPr>
           <a:xfrm>
             <a:off x="640080" y="365760"/>
-            <a:ext cx="7863840" cy="548640"/>
+            <a:ext cx="7863840" cy="640080"/>
           </a:xfrm>
           <a:prstGeom prst="rect">
             <a:avLst/>
@@ -2822,14 +2331,14 @@
           <a:ln/>
         </p:spPr>
         <p:txBody>
-          <a:bodyPr wrap="square" lIns="0" tIns="0" rIns="0" bIns="0" rtlCol="0" anchor="ctr"/>
+          <a:bodyPr wrap="square" rtlCol="0" anchor="ctr"/>
           <a:lstStyle/>
           <a:p>
             <a:pPr indent="0" marL="0">
               <a:buNone/>
             </a:pPr>
             <a:r>
-              <a:rPr lang="en-US" sz="2400" b="1" dirty="0">
+              <a:rPr lang="en-US" sz="2200" b="1" dirty="0">
                 <a:solidFill>
                   <a:srgbClr val="FFFFFF"/>
                 </a:solidFill>
@@ -2839,20 +2348,47 @@
               </a:rPr>
               <a:t>The 10% Rule</a:t>
             </a:r>
-            <a:endParaRPr lang="en-US" sz="2400" dirty="0"/>
-          </a:p>
-        </p:txBody>
-      </p:sp>
-      <p:sp>
-        <p:nvSpPr>
-          <p:cNvPr id="4" name="Text 2"/>
-          <p:cNvSpPr/>
-          <p:nvPr/>
-        </p:nvSpPr>
-        <p:spPr>
-          <a:xfrm>
-            <a:off x="640080" y="1371600"/>
-            <a:ext cx="2621280" cy="1371600"/>
+            <a:endParaRPr lang="en-US" sz="2200" dirty="0"/>
+          </a:p>
+        </p:txBody>
+      </p:sp>
+      <p:sp>
+        <p:nvSpPr>
+          <p:cNvPr id="4" name="Shape 2"/>
+          <p:cNvSpPr/>
+          <p:nvPr/>
+        </p:nvSpPr>
+        <p:spPr>
+          <a:xfrm>
+            <a:off x="640080" y="1280160"/>
+            <a:ext cx="2438400" cy="2926080"/>
+          </a:xfrm>
+          <a:prstGeom prst="rect">
+            <a:avLst/>
+          </a:prstGeom>
+          <a:solidFill>
+            <a:srgbClr val="243660"/>
+          </a:solidFill>
+          <a:ln/>
+          <a:effectLst>
+            <a:outerShdw sx="100000" sy="100000" kx="0" ky="0" algn="bl" rotWithShape="0" blurRad="76200" dist="25400" dir="8100000">
+              <a:srgbClr val="000000">
+                <a:alpha val="12000"/>
+              </a:srgbClr>
+            </a:outerShdw>
+          </a:effectLst>
+        </p:spPr>
+      </p:sp>
+      <p:sp>
+        <p:nvSpPr>
+          <p:cNvPr id="5" name="Text 3"/>
+          <p:cNvSpPr/>
+          <p:nvPr/>
+        </p:nvSpPr>
+        <p:spPr>
+          <a:xfrm>
+            <a:off x="640080" y="1463040"/>
+            <a:ext cx="2438400" cy="1280160"/>
           </a:xfrm>
           <a:prstGeom prst="rect">
             <a:avLst/>
@@ -2870,13 +2406,13 @@
             <a:r>
               <a:rPr lang="en-US" sz="4800" b="1" dirty="0">
                 <a:solidFill>
-                  <a:srgbClr val="1B2A4A"/>
+                  <a:srgbClr val="E9C46A"/>
                 </a:solidFill>
                 <a:latin typeface="Georgia" pitchFamily="34" charset="0"/>
                 <a:ea typeface="Georgia" pitchFamily="34" charset="-122"/>
                 <a:cs typeface="Georgia" pitchFamily="34" charset="-120"/>
               </a:rPr>
-              <a:t>90%</a:t>
+              <a:t>100%</a:t>
             </a:r>
             <a:endParaRPr lang="en-US" sz="4800" dirty="0"/>
           </a:p>
@@ -2884,14 +2420,14 @@
       </p:sp>
       <p:sp>
         <p:nvSpPr>
-          <p:cNvPr id="5" name="Text 3"/>
+          <p:cNvPr id="6" name="Text 4"/>
           <p:cNvSpPr/>
           <p:nvPr/>
         </p:nvSpPr>
         <p:spPr>
           <a:xfrm>
             <a:off x="640080" y="2743200"/>
-            <a:ext cx="2621280" cy="731520"/>
+            <a:ext cx="2438400" cy="548640"/>
           </a:xfrm>
           <a:prstGeom prst="rect">
             <a:avLst/>
@@ -2907,7 +2443,7 @@
               <a:buNone/>
             </a:pPr>
             <a:r>
-              <a:rPr lang="en-US" sz="1400" dirty="0">
+              <a:rPr lang="en-US" sz="1400" b="1" dirty="0">
                 <a:solidFill>
                   <a:srgbClr val="9B9690"/>
                 </a:solidFill>
@@ -2915,7 +2451,7 @@
                 <a:ea typeface="Calibri" pitchFamily="34" charset="-122"/>
                 <a:cs typeface="Calibri" pitchFamily="34" charset="-120"/>
               </a:rPr>
-              <a:t>energy lost as heat</a:t>
+              <a:t>Producer Energy</a:t>
             </a:r>
             <a:endParaRPr lang="en-US" sz="1400" dirty="0"/>
           </a:p>
@@ -2923,14 +2459,14 @@
       </p:sp>
       <p:sp>
         <p:nvSpPr>
-          <p:cNvPr id="6" name="Text 4"/>
-          <p:cNvSpPr/>
-          <p:nvPr/>
-        </p:nvSpPr>
-        <p:spPr>
-          <a:xfrm>
-            <a:off x="3261360" y="1371600"/>
-            <a:ext cx="2621280" cy="1371600"/>
+          <p:cNvPr id="7" name="Text 5"/>
+          <p:cNvSpPr/>
+          <p:nvPr/>
+        </p:nvSpPr>
+        <p:spPr>
+          <a:xfrm>
+            <a:off x="822960" y="3291840"/>
+            <a:ext cx="2072640" cy="731520"/>
           </a:xfrm>
           <a:prstGeom prst="rect">
             <a:avLst/>
@@ -2946,9 +2482,75 @@
               <a:buNone/>
             </a:pPr>
             <a:r>
+              <a:rPr lang="en-US" sz="1200" dirty="0">
+                <a:solidFill>
+                  <a:srgbClr val="9B9690"/>
+                </a:solidFill>
+                <a:latin typeface="Calibri" pitchFamily="34" charset="0"/>
+                <a:ea typeface="Calibri" pitchFamily="34" charset="-122"/>
+                <a:cs typeface="Calibri" pitchFamily="34" charset="-120"/>
+              </a:rPr>
+              <a:t>From sunlight</a:t>
+            </a:r>
+            <a:endParaRPr lang="en-US" sz="1200" dirty="0"/>
+          </a:p>
+        </p:txBody>
+      </p:sp>
+      <p:sp>
+        <p:nvSpPr>
+          <p:cNvPr id="8" name="Shape 6"/>
+          <p:cNvSpPr/>
+          <p:nvPr/>
+        </p:nvSpPr>
+        <p:spPr>
+          <a:xfrm>
+            <a:off x="3352800" y="1280160"/>
+            <a:ext cx="2438400" cy="2926080"/>
+          </a:xfrm>
+          <a:prstGeom prst="rect">
+            <a:avLst/>
+          </a:prstGeom>
+          <a:solidFill>
+            <a:srgbClr val="243660"/>
+          </a:solidFill>
+          <a:ln/>
+          <a:effectLst>
+            <a:outerShdw sx="100000" sy="100000" kx="0" ky="0" algn="bl" rotWithShape="0" blurRad="76200" dist="25400" dir="8100000">
+              <a:srgbClr val="000000">
+                <a:alpha val="12000"/>
+              </a:srgbClr>
+            </a:outerShdw>
+          </a:effectLst>
+        </p:spPr>
+      </p:sp>
+      <p:sp>
+        <p:nvSpPr>
+          <p:cNvPr id="9" name="Text 7"/>
+          <p:cNvSpPr/>
+          <p:nvPr/>
+        </p:nvSpPr>
+        <p:spPr>
+          <a:xfrm>
+            <a:off x="3352800" y="1463040"/>
+            <a:ext cx="2438400" cy="1280160"/>
+          </a:xfrm>
+          <a:prstGeom prst="rect">
+            <a:avLst/>
+          </a:prstGeom>
+          <a:noFill/>
+          <a:ln/>
+        </p:spPr>
+        <p:txBody>
+          <a:bodyPr wrap="square" rtlCol="0" anchor="ctr"/>
+          <a:lstStyle/>
+          <a:p>
+            <a:pPr algn="ctr" indent="0" marL="0">
+              <a:buNone/>
+            </a:pPr>
+            <a:r>
               <a:rPr lang="en-US" sz="4800" b="1" dirty="0">
                 <a:solidFill>
-                  <a:srgbClr val="1B2A4A"/>
+                  <a:srgbClr val="E9C46A"/>
                 </a:solidFill>
                 <a:latin typeface="Georgia" pitchFamily="34" charset="0"/>
                 <a:ea typeface="Georgia" pitchFamily="34" charset="-122"/>
@@ -2962,14 +2564,14 @@
       </p:sp>
       <p:sp>
         <p:nvSpPr>
-          <p:cNvPr id="7" name="Text 5"/>
-          <p:cNvSpPr/>
-          <p:nvPr/>
-        </p:nvSpPr>
-        <p:spPr>
-          <a:xfrm>
-            <a:off x="3261360" y="2743200"/>
-            <a:ext cx="2621280" cy="731520"/>
+          <p:cNvPr id="10" name="Text 8"/>
+          <p:cNvSpPr/>
+          <p:nvPr/>
+        </p:nvSpPr>
+        <p:spPr>
+          <a:xfrm>
+            <a:off x="3352800" y="2743200"/>
+            <a:ext cx="2438400" cy="548640"/>
           </a:xfrm>
           <a:prstGeom prst="rect">
             <a:avLst/>
@@ -2985,7 +2587,7 @@
               <a:buNone/>
             </a:pPr>
             <a:r>
-              <a:rPr lang="en-US" sz="1400" dirty="0">
+              <a:rPr lang="en-US" sz="1400" b="1" dirty="0">
                 <a:solidFill>
                   <a:srgbClr val="9B9690"/>
                 </a:solidFill>
@@ -2993,7 +2595,7 @@
                 <a:ea typeface="Calibri" pitchFamily="34" charset="-122"/>
                 <a:cs typeface="Calibri" pitchFamily="34" charset="-120"/>
               </a:rPr>
-              <a:t>passed to next level</a:t>
+              <a:t>Passed On</a:t>
             </a:r>
             <a:endParaRPr lang="en-US" sz="1400" dirty="0"/>
           </a:p>
@@ -3001,14 +2603,14 @@
       </p:sp>
       <p:sp>
         <p:nvSpPr>
-          <p:cNvPr id="8" name="Text 6"/>
-          <p:cNvSpPr/>
-          <p:nvPr/>
-        </p:nvSpPr>
-        <p:spPr>
-          <a:xfrm>
-            <a:off x="5882640" y="1371600"/>
-            <a:ext cx="2621280" cy="1371600"/>
+          <p:cNvPr id="11" name="Text 9"/>
+          <p:cNvSpPr/>
+          <p:nvPr/>
+        </p:nvSpPr>
+        <p:spPr>
+          <a:xfrm>
+            <a:off x="3535680" y="3291840"/>
+            <a:ext cx="2072640" cy="731520"/>
           </a:xfrm>
           <a:prstGeom prst="rect">
             <a:avLst/>
@@ -3024,15 +2626,81 @@
               <a:buNone/>
             </a:pPr>
             <a:r>
+              <a:rPr lang="en-US" sz="1200" dirty="0">
+                <a:solidFill>
+                  <a:srgbClr val="9B9690"/>
+                </a:solidFill>
+                <a:latin typeface="Calibri" pitchFamily="34" charset="0"/>
+                <a:ea typeface="Calibri" pitchFamily="34" charset="-122"/>
+                <a:cs typeface="Calibri" pitchFamily="34" charset="-120"/>
+              </a:rPr>
+              <a:t>To primary consumer</a:t>
+            </a:r>
+            <a:endParaRPr lang="en-US" sz="1200" dirty="0"/>
+          </a:p>
+        </p:txBody>
+      </p:sp>
+      <p:sp>
+        <p:nvSpPr>
+          <p:cNvPr id="12" name="Shape 10"/>
+          <p:cNvSpPr/>
+          <p:nvPr/>
+        </p:nvSpPr>
+        <p:spPr>
+          <a:xfrm>
+            <a:off x="6065520" y="1280160"/>
+            <a:ext cx="2438400" cy="2926080"/>
+          </a:xfrm>
+          <a:prstGeom prst="rect">
+            <a:avLst/>
+          </a:prstGeom>
+          <a:solidFill>
+            <a:srgbClr val="243660"/>
+          </a:solidFill>
+          <a:ln/>
+          <a:effectLst>
+            <a:outerShdw sx="100000" sy="100000" kx="0" ky="0" algn="bl" rotWithShape="0" blurRad="76200" dist="25400" dir="8100000">
+              <a:srgbClr val="000000">
+                <a:alpha val="12000"/>
+              </a:srgbClr>
+            </a:outerShdw>
+          </a:effectLst>
+        </p:spPr>
+      </p:sp>
+      <p:sp>
+        <p:nvSpPr>
+          <p:cNvPr id="13" name="Text 11"/>
+          <p:cNvSpPr/>
+          <p:nvPr/>
+        </p:nvSpPr>
+        <p:spPr>
+          <a:xfrm>
+            <a:off x="6065520" y="1463040"/>
+            <a:ext cx="2438400" cy="1280160"/>
+          </a:xfrm>
+          <a:prstGeom prst="rect">
+            <a:avLst/>
+          </a:prstGeom>
+          <a:noFill/>
+          <a:ln/>
+        </p:spPr>
+        <p:txBody>
+          <a:bodyPr wrap="square" rtlCol="0" anchor="ctr"/>
+          <a:lstStyle/>
+          <a:p>
+            <a:pPr algn="ctr" indent="0" marL="0">
+              <a:buNone/>
+            </a:pPr>
+            <a:r>
               <a:rPr lang="en-US" sz="4800" b="1" dirty="0">
                 <a:solidFill>
-                  <a:srgbClr val="1B2A4A"/>
+                  <a:srgbClr val="E9C46A"/>
                 </a:solidFill>
                 <a:latin typeface="Georgia" pitchFamily="34" charset="0"/>
                 <a:ea typeface="Georgia" pitchFamily="34" charset="-122"/>
                 <a:cs typeface="Georgia" pitchFamily="34" charset="-120"/>
               </a:rPr>
-              <a:t>4–5</a:t>
+              <a:t>1%</a:t>
             </a:r>
             <a:endParaRPr lang="en-US" sz="4800" dirty="0"/>
           </a:p>
@@ -3040,14 +2708,14 @@
       </p:sp>
       <p:sp>
         <p:nvSpPr>
-          <p:cNvPr id="9" name="Text 7"/>
-          <p:cNvSpPr/>
-          <p:nvPr/>
-        </p:nvSpPr>
-        <p:spPr>
-          <a:xfrm>
-            <a:off x="5882640" y="2743200"/>
-            <a:ext cx="2621280" cy="731520"/>
+          <p:cNvPr id="14" name="Text 12"/>
+          <p:cNvSpPr/>
+          <p:nvPr/>
+        </p:nvSpPr>
+        <p:spPr>
+          <a:xfrm>
+            <a:off x="6065520" y="2743200"/>
+            <a:ext cx="2438400" cy="548640"/>
           </a:xfrm>
           <a:prstGeom prst="rect">
             <a:avLst/>
@@ -3063,7 +2731,7 @@
               <a:buNone/>
             </a:pPr>
             <a:r>
-              <a:rPr lang="en-US" sz="1400" dirty="0">
+              <a:rPr lang="en-US" sz="1400" b="1" dirty="0">
                 <a:solidFill>
                   <a:srgbClr val="9B9690"/>
                 </a:solidFill>
@@ -3071,9 +2739,48 @@
                 <a:ea typeface="Calibri" pitchFamily="34" charset="-122"/>
                 <a:cs typeface="Calibri" pitchFamily="34" charset="-120"/>
               </a:rPr>
-              <a:t>max trophic levels</a:t>
+              <a:t>Secondary</a:t>
             </a:r>
             <a:endParaRPr lang="en-US" sz="1400" dirty="0"/>
+          </a:p>
+        </p:txBody>
+      </p:sp>
+      <p:sp>
+        <p:nvSpPr>
+          <p:cNvPr id="15" name="Text 13"/>
+          <p:cNvSpPr/>
+          <p:nvPr/>
+        </p:nvSpPr>
+        <p:spPr>
+          <a:xfrm>
+            <a:off x="6248400" y="3291840"/>
+            <a:ext cx="2072640" cy="731520"/>
+          </a:xfrm>
+          <a:prstGeom prst="rect">
+            <a:avLst/>
+          </a:prstGeom>
+          <a:noFill/>
+          <a:ln/>
+        </p:spPr>
+        <p:txBody>
+          <a:bodyPr wrap="square" rtlCol="0" anchor="ctr"/>
+          <a:lstStyle/>
+          <a:p>
+            <a:pPr algn="ctr" indent="0" marL="0">
+              <a:buNone/>
+            </a:pPr>
+            <a:r>
+              <a:rPr lang="en-US" sz="1200" dirty="0">
+                <a:solidFill>
+                  <a:srgbClr val="9B9690"/>
+                </a:solidFill>
+                <a:latin typeface="Calibri" pitchFamily="34" charset="0"/>
+                <a:ea typeface="Calibri" pitchFamily="34" charset="-122"/>
+                <a:cs typeface="Calibri" pitchFamily="34" charset="-120"/>
+              </a:rPr>
+              <a:t>Only 1% of original</a:t>
+            </a:r>
+            <a:endParaRPr lang="en-US" sz="1200" dirty="0"/>
           </a:p>
         </p:txBody>
       </p:sp>
@@ -3088,6 +2795,13 @@
 <file path=ppt/slides/slide5.xml><?xml version="1.0" encoding="utf-8"?>
 <p:sld xmlns:a="http://schemas.openxmlformats.org/drawingml/2006/main" xmlns:r="http://schemas.openxmlformats.org/officeDocument/2006/relationships" xmlns:p="http://schemas.openxmlformats.org/presentationml/2006/main">
   <p:cSld name="Slide 5">
+    <p:bg>
+      <p:bgPr>
+        <a:solidFill>
+          <a:srgbClr val="FAF8F5"/>
+        </a:solidFill>
+      </p:bgPr>
+    </p:bg>
     <p:spTree>
       <p:nvGrpSpPr>
         <p:cNvPr id="1" name=""/>
@@ -3111,13 +2825,13 @@
         <p:spPr>
           <a:xfrm>
             <a:off x="0" y="0"/>
-            <a:ext cx="9144000" cy="5143500"/>
-          </a:xfrm>
-          <a:prstGeom prst="rect">
-            <a:avLst/>
-          </a:prstGeom>
-          <a:solidFill>
-            <a:srgbClr val="1B2A4A"/>
+            <a:ext cx="9144000" cy="822960"/>
+          </a:xfrm>
+          <a:prstGeom prst="rect">
+            <a:avLst/>
+          </a:prstGeom>
+          <a:solidFill>
+            <a:srgbClr val="FFFFFF"/>
           </a:solidFill>
           <a:ln/>
         </p:spPr>
@@ -3130,14 +2844,14 @@
         </p:nvSpPr>
         <p:spPr>
           <a:xfrm>
-            <a:off x="0" y="4777740"/>
-            <a:ext cx="9144000" cy="365760"/>
-          </a:xfrm>
-          <a:prstGeom prst="rect">
-            <a:avLst/>
-          </a:prstGeom>
-          <a:solidFill>
-            <a:srgbClr val="1B2A4A"/>
+            <a:off x="0" y="795528"/>
+            <a:ext cx="9144000" cy="27432"/>
+          </a:xfrm>
+          <a:prstGeom prst="rect">
+            <a:avLst/>
+          </a:prstGeom>
+          <a:solidFill>
+            <a:srgbClr val="E9C46A"/>
           </a:solidFill>
           <a:ln/>
         </p:spPr>
@@ -3150,8 +2864,8 @@
         </p:nvSpPr>
         <p:spPr>
           <a:xfrm>
-            <a:off x="731520" y="1371600"/>
-            <a:ext cx="7680960" cy="914400"/>
+            <a:off x="640080" y="91440"/>
+            <a:ext cx="7863840" cy="640080"/>
           </a:xfrm>
           <a:prstGeom prst="rect">
             <a:avLst/>
@@ -3160,24 +2874,24 @@
           <a:ln/>
         </p:spPr>
         <p:txBody>
-          <a:bodyPr wrap="square" rtlCol="0" anchor="ctr"/>
-          <a:lstStyle/>
-          <a:p>
-            <a:pPr algn="ctr" indent="0" marL="0">
+          <a:bodyPr wrap="square" lIns="0" tIns="0" rIns="0" bIns="0" rtlCol="0" anchor="ctr"/>
+          <a:lstStyle/>
+          <a:p>
+            <a:pPr indent="0" marL="0">
               <a:buNone/>
             </a:pPr>
             <a:r>
-              <a:rPr lang="en-US" sz="3600" b="1" dirty="0">
-                <a:solidFill>
-                  <a:srgbClr val="FFFFFF"/>
+              <a:rPr lang="en-US" sz="2200" b="1" dirty="0">
+                <a:solidFill>
+                  <a:srgbClr val="1B2A4A"/>
                 </a:solidFill>
                 <a:latin typeface="Georgia" pitchFamily="34" charset="0"/>
                 <a:ea typeface="Georgia" pitchFamily="34" charset="-122"/>
                 <a:cs typeface="Georgia" pitchFamily="34" charset="-120"/>
               </a:rPr>
-              <a:t>Review &amp; Practise</a:t>
-            </a:r>
-            <a:endParaRPr lang="en-US" sz="3600" dirty="0"/>
+              <a:t>Where Does Energy Go?</a:t>
+            </a:r>
+            <a:endParaRPr lang="en-US" sz="2200" dirty="0"/>
           </a:p>
         </p:txBody>
       </p:sp>
@@ -3189,8 +2903,8 @@
         </p:nvSpPr>
         <p:spPr>
           <a:xfrm>
-            <a:off x="731520" y="2468880"/>
-            <a:ext cx="7680960" cy="548640"/>
+            <a:off x="640080" y="1005840"/>
+            <a:ext cx="7863840" cy="2926080"/>
           </a:xfrm>
           <a:prstGeom prst="rect">
             <a:avLst/>
@@ -3202,60 +2916,1389 @@
           <a:bodyPr wrap="square" rtlCol="0" anchor="ctr"/>
           <a:lstStyle/>
           <a:p>
-            <a:pPr algn="ctr" indent="0" marL="0">
-              <a:buNone/>
-            </a:pPr>
-            <a:r>
-              <a:rPr lang="en-US" sz="1800" dirty="0">
-                <a:solidFill>
-                  <a:srgbClr val="1B2A4A"/>
+            <a:pPr marL="342900" indent="-342900">
+              <a:spcAft>
+                <a:spcPts val="800"/>
+              </a:spcAft>
+              <a:buSzPct val="100000"/>
+              <a:buChar char="•"/>
+            </a:pPr>
+            <a:r>
+              <a:rPr lang="en-US" sz="1600" dirty="0">
+                <a:solidFill>
+                  <a:srgbClr val="3D3A36"/>
                 </a:solidFill>
                 <a:latin typeface="Calibri" pitchFamily="34" charset="0"/>
                 <a:ea typeface="Calibri" pitchFamily="34" charset="-122"/>
                 <a:cs typeface="Calibri" pitchFamily="34" charset="-120"/>
               </a:rPr>
-              <a:t>learnlattice.org/students/exam-revision</a:t>
-            </a:r>
-            <a:endParaRPr lang="en-US" sz="1800" dirty="0"/>
-          </a:p>
-        </p:txBody>
-      </p:sp>
-      <p:sp>
-        <p:nvSpPr>
-          <p:cNvPr id="6" name="Text 4"/>
-          <p:cNvSpPr/>
-          <p:nvPr/>
-        </p:nvSpPr>
-        <p:spPr>
-          <a:xfrm>
-            <a:off x="731520" y="3200400"/>
-            <a:ext cx="7680960" cy="457200"/>
-          </a:xfrm>
-          <a:prstGeom prst="rect">
-            <a:avLst/>
-          </a:prstGeom>
-          <a:noFill/>
-          <a:ln/>
-        </p:spPr>
-        <p:txBody>
-          <a:bodyPr wrap="square" rtlCol="0" anchor="ctr"/>
-          <a:lstStyle/>
-          <a:p>
-            <a:pPr algn="ctr" indent="0" marL="0">
-              <a:buNone/>
-            </a:pPr>
-            <a:r>
-              <a:rPr lang="en-US" sz="1400" dirty="0">
-                <a:solidFill>
-                  <a:srgbClr val="9B9690"/>
+              <a:t>Respiration — life processes (released as heat).</a:t>
+            </a:r>
+            <a:endParaRPr lang="en-US" sz="1600" dirty="0"/>
+          </a:p>
+          <a:p>
+            <a:pPr marL="342900" indent="-342900">
+              <a:spcAft>
+                <a:spcPts val="800"/>
+              </a:spcAft>
+              <a:buSzPct val="100000"/>
+              <a:buChar char="•"/>
+            </a:pPr>
+            <a:r>
+              <a:rPr lang="en-US" sz="1600" dirty="0">
+                <a:solidFill>
+                  <a:srgbClr val="3D3A36"/>
                 </a:solidFill>
                 <a:latin typeface="Calibri" pitchFamily="34" charset="0"/>
                 <a:ea typeface="Calibri" pitchFamily="34" charset="-122"/>
                 <a:cs typeface="Calibri" pitchFamily="34" charset="-120"/>
               </a:rPr>
+              <a:t>Movement — animals use energy to move, hunt, escape.</a:t>
+            </a:r>
+            <a:endParaRPr lang="en-US" sz="1600" dirty="0"/>
+          </a:p>
+          <a:p>
+            <a:pPr marL="342900" indent="-342900">
+              <a:spcAft>
+                <a:spcPts val="800"/>
+              </a:spcAft>
+              <a:buSzPct val="100000"/>
+              <a:buChar char="•"/>
+            </a:pPr>
+            <a:r>
+              <a:rPr lang="en-US" sz="1600" dirty="0">
+                <a:solidFill>
+                  <a:srgbClr val="3D3A36"/>
+                </a:solidFill>
+                <a:latin typeface="Calibri" pitchFamily="34" charset="0"/>
+                <a:ea typeface="Calibri" pitchFamily="34" charset="-122"/>
+                <a:cs typeface="Calibri" pitchFamily="34" charset="-120"/>
+              </a:rPr>
+              <a:t>Waste — not all food is digested.</a:t>
+            </a:r>
+            <a:endParaRPr lang="en-US" sz="1600" dirty="0"/>
+          </a:p>
+          <a:p>
+            <a:pPr marL="342900" indent="-342900">
+              <a:spcAft>
+                <a:spcPts val="800"/>
+              </a:spcAft>
+              <a:buSzPct val="100000"/>
+              <a:buChar char="•"/>
+            </a:pPr>
+            <a:r>
+              <a:rPr lang="en-US" sz="1600" dirty="0">
+                <a:solidFill>
+                  <a:srgbClr val="3D3A36"/>
+                </a:solidFill>
+                <a:latin typeface="Calibri" pitchFamily="34" charset="0"/>
+                <a:ea typeface="Calibri" pitchFamily="34" charset="-122"/>
+                <a:cs typeface="Calibri" pitchFamily="34" charset="-120"/>
+              </a:rPr>
+              <a:t>Growth — small amount becomes new tissue.</a:t>
+            </a:r>
+            <a:endParaRPr lang="en-US" sz="1600" dirty="0"/>
+          </a:p>
+          <a:p>
+            <a:pPr marL="342900" indent="-342900">
+              <a:spcAft>
+                <a:spcPts val="800"/>
+              </a:spcAft>
+              <a:buSzPct val="100000"/>
+              <a:buChar char="•"/>
+            </a:pPr>
+            <a:r>
+              <a:rPr lang="en-US" sz="1600" dirty="0">
+                <a:solidFill>
+                  <a:srgbClr val="3D3A36"/>
+                </a:solidFill>
+                <a:latin typeface="Calibri" pitchFamily="34" charset="0"/>
+                <a:ea typeface="Calibri" pitchFamily="34" charset="-122"/>
+                <a:cs typeface="Calibri" pitchFamily="34" charset="-120"/>
+              </a:rPr>
+              <a:t>Only 'growth' is available to the next consumer.</a:t>
+            </a:r>
+            <a:endParaRPr lang="en-US" sz="1600" dirty="0"/>
+          </a:p>
+        </p:txBody>
+      </p:sp>
+    </p:spTree>
+  </p:cSld>
+  <p:clrMapOvr>
+    <a:masterClrMapping/>
+  </p:clrMapOvr>
+</p:sld>
+</file>
+
+<file path=ppt/slides/slide6.xml><?xml version="1.0" encoding="utf-8"?>
+<p:sld xmlns:a="http://schemas.openxmlformats.org/drawingml/2006/main" xmlns:r="http://schemas.openxmlformats.org/officeDocument/2006/relationships" xmlns:p="http://schemas.openxmlformats.org/presentationml/2006/main">
+  <p:cSld name="Slide 6">
+    <p:bg>
+      <p:bgPr>
+        <a:solidFill>
+          <a:srgbClr val="FAF8F5"/>
+        </a:solidFill>
+      </p:bgPr>
+    </p:bg>
+    <p:spTree>
+      <p:nvGrpSpPr>
+        <p:cNvPr id="1" name=""/>
+        <p:cNvGrpSpPr/>
+        <p:nvPr/>
+      </p:nvGrpSpPr>
+      <p:grpSpPr>
+        <a:xfrm>
+          <a:off x="0" y="0"/>
+          <a:ext cx="0" cy="0"/>
+          <a:chOff x="0" y="0"/>
+          <a:chExt cx="0" cy="0"/>
+        </a:xfrm>
+      </p:grpSpPr>
+      <p:sp>
+        <p:nvSpPr>
+          <p:cNvPr id="2" name="Shape 0"/>
+          <p:cNvSpPr/>
+          <p:nvPr/>
+        </p:nvSpPr>
+        <p:spPr>
+          <a:xfrm>
+            <a:off x="0" y="0"/>
+            <a:ext cx="9144000" cy="822960"/>
+          </a:xfrm>
+          <a:prstGeom prst="rect">
+            <a:avLst/>
+          </a:prstGeom>
+          <a:solidFill>
+            <a:srgbClr val="FFFFFF"/>
+          </a:solidFill>
+          <a:ln/>
+        </p:spPr>
+      </p:sp>
+      <p:sp>
+        <p:nvSpPr>
+          <p:cNvPr id="3" name="Shape 1"/>
+          <p:cNvSpPr/>
+          <p:nvPr/>
+        </p:nvSpPr>
+        <p:spPr>
+          <a:xfrm>
+            <a:off x="0" y="795528"/>
+            <a:ext cx="9144000" cy="27432"/>
+          </a:xfrm>
+          <a:prstGeom prst="rect">
+            <a:avLst/>
+          </a:prstGeom>
+          <a:solidFill>
+            <a:srgbClr val="E9C46A"/>
+          </a:solidFill>
+          <a:ln/>
+        </p:spPr>
+      </p:sp>
+      <p:sp>
+        <p:nvSpPr>
+          <p:cNvPr id="4" name="Text 2"/>
+          <p:cNvSpPr/>
+          <p:nvPr/>
+        </p:nvSpPr>
+        <p:spPr>
+          <a:xfrm>
+            <a:off x="640080" y="91440"/>
+            <a:ext cx="7863840" cy="640080"/>
+          </a:xfrm>
+          <a:prstGeom prst="rect">
+            <a:avLst/>
+          </a:prstGeom>
+          <a:noFill/>
+          <a:ln/>
+        </p:spPr>
+        <p:txBody>
+          <a:bodyPr wrap="square" lIns="0" tIns="0" rIns="0" bIns="0" rtlCol="0" anchor="ctr"/>
+          <a:lstStyle/>
+          <a:p>
+            <a:pPr indent="0" marL="0">
+              <a:buNone/>
+            </a:pPr>
+            <a:r>
+              <a:rPr lang="en-US" sz="2200" b="1" dirty="0">
+                <a:solidFill>
+                  <a:srgbClr val="1B2A4A"/>
+                </a:solidFill>
+                <a:latin typeface="Georgia" pitchFamily="34" charset="0"/>
+                <a:ea typeface="Georgia" pitchFamily="34" charset="-122"/>
+                <a:cs typeface="Georgia" pitchFamily="34" charset="-120"/>
+              </a:rPr>
+              <a:t>Pyramids of Energy</a:t>
+            </a:r>
+            <a:endParaRPr lang="en-US" sz="2200" dirty="0"/>
+          </a:p>
+        </p:txBody>
+      </p:sp>
+      <p:sp>
+        <p:nvSpPr>
+          <p:cNvPr id="5" name="Shape 3"/>
+          <p:cNvSpPr/>
+          <p:nvPr/>
+        </p:nvSpPr>
+        <p:spPr>
+          <a:xfrm>
+            <a:off x="457200" y="1005840"/>
+            <a:ext cx="3931920" cy="3657600"/>
+          </a:xfrm>
+          <a:prstGeom prst="rect">
+            <a:avLst/>
+          </a:prstGeom>
+          <a:solidFill>
+            <a:srgbClr val="FFFFFF"/>
+          </a:solidFill>
+          <a:ln/>
+          <a:effectLst>
+            <a:outerShdw sx="100000" sy="100000" kx="0" ky="0" algn="bl" rotWithShape="0" blurRad="76200" dist="25400" dir="8100000">
+              <a:srgbClr val="000000">
+                <a:alpha val="12000"/>
+              </a:srgbClr>
+            </a:outerShdw>
+          </a:effectLst>
+        </p:spPr>
+      </p:sp>
+      <p:sp>
+        <p:nvSpPr>
+          <p:cNvPr id="6" name="Shape 4"/>
+          <p:cNvSpPr/>
+          <p:nvPr/>
+        </p:nvSpPr>
+        <p:spPr>
+          <a:xfrm>
+            <a:off x="457200" y="1005840"/>
+            <a:ext cx="3931920" cy="64008"/>
+          </a:xfrm>
+          <a:prstGeom prst="rect">
+            <a:avLst/>
+          </a:prstGeom>
+          <a:solidFill>
+            <a:srgbClr val="E9C46A"/>
+          </a:solidFill>
+          <a:ln/>
+        </p:spPr>
+      </p:sp>
+      <p:sp>
+        <p:nvSpPr>
+          <p:cNvPr id="7" name="Text 5"/>
+          <p:cNvSpPr/>
+          <p:nvPr/>
+        </p:nvSpPr>
+        <p:spPr>
+          <a:xfrm>
+            <a:off x="640080" y="1188720"/>
+            <a:ext cx="3566160" cy="457200"/>
+          </a:xfrm>
+          <a:prstGeom prst="rect">
+            <a:avLst/>
+          </a:prstGeom>
+          <a:noFill/>
+          <a:ln/>
+        </p:spPr>
+        <p:txBody>
+          <a:bodyPr wrap="square" rtlCol="0" anchor="ctr"/>
+          <a:lstStyle/>
+          <a:p>
+            <a:pPr indent="0" marL="0">
+              <a:buNone/>
+            </a:pPr>
+            <a:r>
+              <a:rPr lang="en-US" sz="1600" b="1" dirty="0">
+                <a:solidFill>
+                  <a:srgbClr val="E9C46A"/>
+                </a:solidFill>
+                <a:latin typeface="Calibri" pitchFamily="34" charset="0"/>
+                <a:ea typeface="Calibri" pitchFamily="34" charset="-122"/>
+                <a:cs typeface="Calibri" pitchFamily="34" charset="-120"/>
+              </a:rPr>
+              <a:t>What They Show</a:t>
+            </a:r>
+            <a:endParaRPr lang="en-US" sz="1600" dirty="0"/>
+          </a:p>
+        </p:txBody>
+      </p:sp>
+      <p:sp>
+        <p:nvSpPr>
+          <p:cNvPr id="8" name="Text 6"/>
+          <p:cNvSpPr/>
+          <p:nvPr/>
+        </p:nvSpPr>
+        <p:spPr>
+          <a:xfrm>
+            <a:off x="640080" y="1691640"/>
+            <a:ext cx="3566160" cy="2743200"/>
+          </a:xfrm>
+          <a:prstGeom prst="rect">
+            <a:avLst/>
+          </a:prstGeom>
+          <a:noFill/>
+          <a:ln/>
+        </p:spPr>
+        <p:txBody>
+          <a:bodyPr wrap="square" rtlCol="0" anchor="ctr"/>
+          <a:lstStyle/>
+          <a:p>
+            <a:pPr marL="342900" indent="-342900">
+              <a:spcAft>
+                <a:spcPts val="600"/>
+              </a:spcAft>
+              <a:buSzPct val="100000"/>
+              <a:buChar char="•"/>
+            </a:pPr>
+            <a:r>
+              <a:rPr lang="en-US" sz="1400" dirty="0">
+                <a:solidFill>
+                  <a:srgbClr val="3D3A36"/>
+                </a:solidFill>
+                <a:latin typeface="Calibri" pitchFamily="34" charset="0"/>
+                <a:ea typeface="Calibri" pitchFamily="34" charset="-122"/>
+                <a:cs typeface="Calibri" pitchFamily="34" charset="-120"/>
+              </a:rPr>
+              <a:t>Energy at each trophic level.</a:t>
+            </a:r>
+            <a:endParaRPr lang="en-US" sz="1400" dirty="0"/>
+          </a:p>
+          <a:p>
+            <a:pPr marL="342900" indent="-342900">
+              <a:spcAft>
+                <a:spcPts val="600"/>
+              </a:spcAft>
+              <a:buSzPct val="100000"/>
+              <a:buChar char="•"/>
+            </a:pPr>
+            <a:r>
+              <a:rPr lang="en-US" sz="1400" dirty="0">
+                <a:solidFill>
+                  <a:srgbClr val="3D3A36"/>
+                </a:solidFill>
+                <a:latin typeface="Calibri" pitchFamily="34" charset="0"/>
+                <a:ea typeface="Calibri" pitchFamily="34" charset="-122"/>
+                <a:cs typeface="Calibri" pitchFamily="34" charset="-120"/>
+              </a:rPr>
+              <a:t>Always pyramid-shaped.</a:t>
+            </a:r>
+            <a:endParaRPr lang="en-US" sz="1400" dirty="0"/>
+          </a:p>
+          <a:p>
+            <a:pPr marL="342900" indent="-342900">
+              <a:spcAft>
+                <a:spcPts val="600"/>
+              </a:spcAft>
+              <a:buSzPct val="100000"/>
+              <a:buChar char="•"/>
+            </a:pPr>
+            <a:r>
+              <a:rPr lang="en-US" sz="1400" dirty="0">
+                <a:solidFill>
+                  <a:srgbClr val="3D3A36"/>
+                </a:solidFill>
+                <a:latin typeface="Calibri" pitchFamily="34" charset="0"/>
+                <a:ea typeface="Calibri" pitchFamily="34" charset="-122"/>
+                <a:cs typeface="Calibri" pitchFamily="34" charset="-120"/>
+              </a:rPr>
+              <a:t>Wide at bottom (producers).</a:t>
+            </a:r>
+            <a:endParaRPr lang="en-US" sz="1400" dirty="0"/>
+          </a:p>
+          <a:p>
+            <a:pPr marL="342900" indent="-342900">
+              <a:spcAft>
+                <a:spcPts val="600"/>
+              </a:spcAft>
+              <a:buSzPct val="100000"/>
+              <a:buChar char="•"/>
+            </a:pPr>
+            <a:r>
+              <a:rPr lang="en-US" sz="1400" dirty="0">
+                <a:solidFill>
+                  <a:srgbClr val="3D3A36"/>
+                </a:solidFill>
+                <a:latin typeface="Calibri" pitchFamily="34" charset="0"/>
+                <a:ea typeface="Calibri" pitchFamily="34" charset="-122"/>
+                <a:cs typeface="Calibri" pitchFamily="34" charset="-120"/>
+              </a:rPr>
+              <a:t>Narrow at top (predators).</a:t>
+            </a:r>
+            <a:endParaRPr lang="en-US" sz="1400" dirty="0"/>
+          </a:p>
+        </p:txBody>
+      </p:sp>
+      <p:sp>
+        <p:nvSpPr>
+          <p:cNvPr id="9" name="Shape 7"/>
+          <p:cNvSpPr/>
+          <p:nvPr/>
+        </p:nvSpPr>
+        <p:spPr>
+          <a:xfrm>
+            <a:off x="4754880" y="1005840"/>
+            <a:ext cx="3931920" cy="3657600"/>
+          </a:xfrm>
+          <a:prstGeom prst="rect">
+            <a:avLst/>
+          </a:prstGeom>
+          <a:solidFill>
+            <a:srgbClr val="FFFFFF"/>
+          </a:solidFill>
+          <a:ln/>
+          <a:effectLst>
+            <a:outerShdw sx="100000" sy="100000" kx="0" ky="0" algn="bl" rotWithShape="0" blurRad="76200" dist="25400" dir="8100000">
+              <a:srgbClr val="000000">
+                <a:alpha val="12000"/>
+              </a:srgbClr>
+            </a:outerShdw>
+          </a:effectLst>
+        </p:spPr>
+      </p:sp>
+      <p:sp>
+        <p:nvSpPr>
+          <p:cNvPr id="10" name="Shape 8"/>
+          <p:cNvSpPr/>
+          <p:nvPr/>
+        </p:nvSpPr>
+        <p:spPr>
+          <a:xfrm>
+            <a:off x="4754880" y="1005840"/>
+            <a:ext cx="3931920" cy="64008"/>
+          </a:xfrm>
+          <a:prstGeom prst="rect">
+            <a:avLst/>
+          </a:prstGeom>
+          <a:solidFill>
+            <a:srgbClr val="E9C46A"/>
+          </a:solidFill>
+          <a:ln/>
+        </p:spPr>
+      </p:sp>
+      <p:sp>
+        <p:nvSpPr>
+          <p:cNvPr id="11" name="Text 9"/>
+          <p:cNvSpPr/>
+          <p:nvPr/>
+        </p:nvSpPr>
+        <p:spPr>
+          <a:xfrm>
+            <a:off x="4937760" y="1188720"/>
+            <a:ext cx="3566160" cy="457200"/>
+          </a:xfrm>
+          <a:prstGeom prst="rect">
+            <a:avLst/>
+          </a:prstGeom>
+          <a:noFill/>
+          <a:ln/>
+        </p:spPr>
+        <p:txBody>
+          <a:bodyPr wrap="square" rtlCol="0" anchor="ctr"/>
+          <a:lstStyle/>
+          <a:p>
+            <a:pPr indent="0" marL="0">
+              <a:buNone/>
+            </a:pPr>
+            <a:r>
+              <a:rPr lang="en-US" sz="1600" b="1" dirty="0">
+                <a:solidFill>
+                  <a:srgbClr val="E9C46A"/>
+                </a:solidFill>
+                <a:latin typeface="Calibri" pitchFamily="34" charset="0"/>
+                <a:ea typeface="Calibri" pitchFamily="34" charset="-122"/>
+                <a:cs typeface="Calibri" pitchFamily="34" charset="-120"/>
+              </a:rPr>
+              <a:t>Why It Matters</a:t>
+            </a:r>
+            <a:endParaRPr lang="en-US" sz="1600" dirty="0"/>
+          </a:p>
+        </p:txBody>
+      </p:sp>
+      <p:sp>
+        <p:nvSpPr>
+          <p:cNvPr id="12" name="Text 10"/>
+          <p:cNvSpPr/>
+          <p:nvPr/>
+        </p:nvSpPr>
+        <p:spPr>
+          <a:xfrm>
+            <a:off x="4937760" y="1691640"/>
+            <a:ext cx="3566160" cy="2743200"/>
+          </a:xfrm>
+          <a:prstGeom prst="rect">
+            <a:avLst/>
+          </a:prstGeom>
+          <a:noFill/>
+          <a:ln/>
+        </p:spPr>
+        <p:txBody>
+          <a:bodyPr wrap="square" rtlCol="0" anchor="ctr"/>
+          <a:lstStyle/>
+          <a:p>
+            <a:pPr marL="342900" indent="-342900">
+              <a:spcAft>
+                <a:spcPts val="600"/>
+              </a:spcAft>
+              <a:buSzPct val="100000"/>
+              <a:buChar char="•"/>
+            </a:pPr>
+            <a:r>
+              <a:rPr lang="en-US" sz="1400" dirty="0">
+                <a:solidFill>
+                  <a:srgbClr val="3D3A36"/>
+                </a:solidFill>
+                <a:latin typeface="Calibri" pitchFamily="34" charset="0"/>
+                <a:ea typeface="Calibri" pitchFamily="34" charset="-122"/>
+                <a:cs typeface="Calibri" pitchFamily="34" charset="-120"/>
+              </a:rPr>
+              <a:t>Korean rice paddies: vast energy base.</a:t>
+            </a:r>
+            <a:endParaRPr lang="en-US" sz="1400" dirty="0"/>
+          </a:p>
+          <a:p>
+            <a:pPr marL="342900" indent="-342900">
+              <a:spcAft>
+                <a:spcPts val="600"/>
+              </a:spcAft>
+              <a:buSzPct val="100000"/>
+              <a:buChar char="•"/>
+            </a:pPr>
+            <a:r>
+              <a:rPr lang="en-US" sz="1400" dirty="0">
+                <a:solidFill>
+                  <a:srgbClr val="3D3A36"/>
+                </a:solidFill>
+                <a:latin typeface="Calibri" pitchFamily="34" charset="0"/>
+                <a:ea typeface="Calibri" pitchFamily="34" charset="-122"/>
+                <a:cs typeface="Calibri" pitchFamily="34" charset="-120"/>
+              </a:rPr>
+              <a:t>Fewer predators can be supported.</a:t>
+            </a:r>
+            <a:endParaRPr lang="en-US" sz="1400" dirty="0"/>
+          </a:p>
+          <a:p>
+            <a:pPr marL="342900" indent="-342900">
+              <a:spcAft>
+                <a:spcPts val="600"/>
+              </a:spcAft>
+              <a:buSzPct val="100000"/>
+              <a:buChar char="•"/>
+            </a:pPr>
+            <a:r>
+              <a:rPr lang="en-US" sz="1400" dirty="0">
+                <a:solidFill>
+                  <a:srgbClr val="3D3A36"/>
+                </a:solidFill>
+                <a:latin typeface="Calibri" pitchFamily="34" charset="0"/>
+                <a:ea typeface="Calibri" pitchFamily="34" charset="-122"/>
+                <a:cs typeface="Calibri" pitchFamily="34" charset="-120"/>
+              </a:rPr>
+              <a:t>Food chains stay short.</a:t>
+            </a:r>
+            <a:endParaRPr lang="en-US" sz="1400" dirty="0"/>
+          </a:p>
+          <a:p>
+            <a:pPr marL="342900" indent="-342900">
+              <a:spcAft>
+                <a:spcPts val="600"/>
+              </a:spcAft>
+              <a:buSzPct val="100000"/>
+              <a:buChar char="•"/>
+            </a:pPr>
+            <a:r>
+              <a:rPr lang="en-US" sz="1400" dirty="0">
+                <a:solidFill>
+                  <a:srgbClr val="3D3A36"/>
+                </a:solidFill>
+                <a:latin typeface="Calibri" pitchFamily="34" charset="0"/>
+                <a:ea typeface="Calibri" pitchFamily="34" charset="-122"/>
+                <a:cs typeface="Calibri" pitchFamily="34" charset="-120"/>
+              </a:rPr>
+              <a:t>Units: kJ/m²/year.</a:t>
+            </a:r>
+            <a:endParaRPr lang="en-US" sz="1400" dirty="0"/>
+          </a:p>
+        </p:txBody>
+      </p:sp>
+    </p:spTree>
+  </p:cSld>
+  <p:clrMapOvr>
+    <a:masterClrMapping/>
+  </p:clrMapOvr>
+</p:sld>
+</file>
+
+<file path=ppt/slides/slide7.xml><?xml version="1.0" encoding="utf-8"?>
+<p:sld xmlns:a="http://schemas.openxmlformats.org/drawingml/2006/main" xmlns:r="http://schemas.openxmlformats.org/officeDocument/2006/relationships" xmlns:p="http://schemas.openxmlformats.org/presentationml/2006/main">
+  <p:cSld name="Slide 7">
+    <p:bg>
+      <p:bgPr>
+        <a:solidFill>
+          <a:srgbClr val="FAF8F5"/>
+        </a:solidFill>
+      </p:bgPr>
+    </p:bg>
+    <p:spTree>
+      <p:nvGrpSpPr>
+        <p:cNvPr id="1" name=""/>
+        <p:cNvGrpSpPr/>
+        <p:nvPr/>
+      </p:nvGrpSpPr>
+      <p:grpSpPr>
+        <a:xfrm>
+          <a:off x="0" y="0"/>
+          <a:ext cx="0" cy="0"/>
+          <a:chOff x="0" y="0"/>
+          <a:chExt cx="0" cy="0"/>
+        </a:xfrm>
+      </p:grpSpPr>
+      <p:sp>
+        <p:nvSpPr>
+          <p:cNvPr id="2" name="Shape 0"/>
+          <p:cNvSpPr/>
+          <p:nvPr/>
+        </p:nvSpPr>
+        <p:spPr>
+          <a:xfrm>
+            <a:off x="0" y="0"/>
+            <a:ext cx="9144000" cy="822960"/>
+          </a:xfrm>
+          <a:prstGeom prst="rect">
+            <a:avLst/>
+          </a:prstGeom>
+          <a:solidFill>
+            <a:srgbClr val="FFFFFF"/>
+          </a:solidFill>
+          <a:ln/>
+        </p:spPr>
+      </p:sp>
+      <p:sp>
+        <p:nvSpPr>
+          <p:cNvPr id="3" name="Shape 1"/>
+          <p:cNvSpPr/>
+          <p:nvPr/>
+        </p:nvSpPr>
+        <p:spPr>
+          <a:xfrm>
+            <a:off x="0" y="795528"/>
+            <a:ext cx="9144000" cy="27432"/>
+          </a:xfrm>
+          <a:prstGeom prst="rect">
+            <a:avLst/>
+          </a:prstGeom>
+          <a:solidFill>
+            <a:srgbClr val="E9C46A"/>
+          </a:solidFill>
+          <a:ln/>
+        </p:spPr>
+      </p:sp>
+      <p:sp>
+        <p:nvSpPr>
+          <p:cNvPr id="4" name="Text 2"/>
+          <p:cNvSpPr/>
+          <p:nvPr/>
+        </p:nvSpPr>
+        <p:spPr>
+          <a:xfrm>
+            <a:off x="640080" y="91440"/>
+            <a:ext cx="7863840" cy="640080"/>
+          </a:xfrm>
+          <a:prstGeom prst="rect">
+            <a:avLst/>
+          </a:prstGeom>
+          <a:noFill/>
+          <a:ln/>
+        </p:spPr>
+        <p:txBody>
+          <a:bodyPr wrap="square" lIns="0" tIns="0" rIns="0" bIns="0" rtlCol="0" anchor="ctr"/>
+          <a:lstStyle/>
+          <a:p>
+            <a:pPr indent="0" marL="0">
+              <a:buNone/>
+            </a:pPr>
+            <a:r>
+              <a:rPr lang="en-US" sz="2200" b="1" dirty="0">
+                <a:solidFill>
+                  <a:srgbClr val="1B2A4A"/>
+                </a:solidFill>
+                <a:latin typeface="Georgia" pitchFamily="34" charset="0"/>
+                <a:ea typeface="Georgia" pitchFamily="34" charset="-122"/>
+                <a:cs typeface="Georgia" pitchFamily="34" charset="-120"/>
+              </a:rPr>
+              <a:t>Recommended Videos</a:t>
+            </a:r>
+            <a:endParaRPr lang="en-US" sz="2200" dirty="0"/>
+          </a:p>
+        </p:txBody>
+      </p:sp>
+      <p:sp>
+        <p:nvSpPr>
+          <p:cNvPr id="5" name="Text 3"/>
+          <p:cNvSpPr/>
+          <p:nvPr/>
+        </p:nvSpPr>
+        <p:spPr>
+          <a:xfrm>
+            <a:off x="640080" y="868680"/>
+            <a:ext cx="7863840" cy="274320"/>
+          </a:xfrm>
+          <a:prstGeom prst="rect">
+            <a:avLst/>
+          </a:prstGeom>
+          <a:noFill/>
+          <a:ln/>
+        </p:spPr>
+        <p:txBody>
+          <a:bodyPr wrap="square" rtlCol="0" anchor="ctr"/>
+          <a:lstStyle/>
+          <a:p>
+            <a:pPr indent="0" marL="0">
+              <a:buNone/>
+            </a:pPr>
+            <a:r>
+              <a:rPr lang="en-US" sz="1200" i="1" dirty="0">
+                <a:solidFill>
+                  <a:srgbClr val="6B6660"/>
+                </a:solidFill>
+                <a:latin typeface="Calibri" pitchFamily="34" charset="0"/>
+                <a:ea typeface="Calibri" pitchFamily="34" charset="-122"/>
+                <a:cs typeface="Calibri" pitchFamily="34" charset="-120"/>
+              </a:rPr>
+              <a:t>Search these on YouTube to learn more.</a:t>
+            </a:r>
+            <a:endParaRPr lang="en-US" sz="1200" dirty="0"/>
+          </a:p>
+        </p:txBody>
+      </p:sp>
+      <p:sp>
+        <p:nvSpPr>
+          <p:cNvPr id="6" name="Shape 4"/>
+          <p:cNvSpPr/>
+          <p:nvPr/>
+        </p:nvSpPr>
+        <p:spPr>
+          <a:xfrm>
+            <a:off x="457200" y="1234440"/>
+            <a:ext cx="8229600" cy="1051560"/>
+          </a:xfrm>
+          <a:prstGeom prst="rect">
+            <a:avLst/>
+          </a:prstGeom>
+          <a:solidFill>
+            <a:srgbClr val="FFFFFF"/>
+          </a:solidFill>
+          <a:ln/>
+          <a:effectLst>
+            <a:outerShdw sx="100000" sy="100000" kx="0" ky="0" algn="bl" rotWithShape="0" blurRad="76200" dist="25400" dir="8100000">
+              <a:srgbClr val="000000">
+                <a:alpha val="12000"/>
+              </a:srgbClr>
+            </a:outerShdw>
+          </a:effectLst>
+        </p:spPr>
+      </p:sp>
+      <p:sp>
+        <p:nvSpPr>
+          <p:cNvPr id="7" name="Shape 5"/>
+          <p:cNvSpPr/>
+          <p:nvPr/>
+        </p:nvSpPr>
+        <p:spPr>
+          <a:xfrm>
+            <a:off x="457200" y="1234440"/>
+            <a:ext cx="64008" cy="1051560"/>
+          </a:xfrm>
+          <a:prstGeom prst="rect">
+            <a:avLst/>
+          </a:prstGeom>
+          <a:solidFill>
+            <a:srgbClr val="E9C46A"/>
+          </a:solidFill>
+          <a:ln/>
+        </p:spPr>
+      </p:sp>
+      <p:sp>
+        <p:nvSpPr>
+          <p:cNvPr id="8" name="Text 6"/>
+          <p:cNvSpPr/>
+          <p:nvPr/>
+        </p:nvSpPr>
+        <p:spPr>
+          <a:xfrm>
+            <a:off x="640080" y="1325880"/>
+            <a:ext cx="457200" cy="457200"/>
+          </a:xfrm>
+          <a:prstGeom prst="rect">
+            <a:avLst/>
+          </a:prstGeom>
+          <a:noFill/>
+          <a:ln/>
+        </p:spPr>
+        <p:txBody>
+          <a:bodyPr wrap="square" rtlCol="0" anchor="ctr"/>
+          <a:lstStyle/>
+          <a:p>
+            <a:pPr algn="ctr" indent="0" marL="0">
+              <a:buNone/>
+            </a:pPr>
+            <a:r>
+              <a:rPr lang="en-US" sz="2000" dirty="0">
+                <a:solidFill>
+                  <a:srgbClr val="E9C46A"/>
+                </a:solidFill>
+                <a:latin typeface="Calibri" pitchFamily="34" charset="0"/>
+                <a:ea typeface="Calibri" pitchFamily="34" charset="-122"/>
+                <a:cs typeface="Calibri" pitchFamily="34" charset="-120"/>
+              </a:rPr>
+              <a:t>▶</a:t>
+            </a:r>
+            <a:endParaRPr lang="en-US" sz="2000" dirty="0"/>
+          </a:p>
+        </p:txBody>
+      </p:sp>
+      <p:sp>
+        <p:nvSpPr>
+          <p:cNvPr id="9" name="Text 7"/>
+          <p:cNvSpPr/>
+          <p:nvPr/>
+        </p:nvSpPr>
+        <p:spPr>
+          <a:xfrm>
+            <a:off x="1188720" y="1307592"/>
+            <a:ext cx="7132320" cy="411480"/>
+          </a:xfrm>
+          <a:prstGeom prst="rect">
+            <a:avLst/>
+          </a:prstGeom>
+          <a:noFill/>
+          <a:ln/>
+        </p:spPr>
+        <p:txBody>
+          <a:bodyPr wrap="square" rtlCol="0" anchor="ctr"/>
+          <a:lstStyle/>
+          <a:p>
+            <a:pPr indent="0" marL="0">
+              <a:buNone/>
+            </a:pPr>
+            <a:r>
+              <a:rPr lang="en-US" sz="1400" b="1" dirty="0">
+                <a:solidFill>
+                  <a:srgbClr val="1B2A4A"/>
+                </a:solidFill>
+                <a:latin typeface="Calibri" pitchFamily="34" charset="0"/>
+                <a:ea typeface="Calibri" pitchFamily="34" charset="-122"/>
+                <a:cs typeface="Calibri" pitchFamily="34" charset="-120"/>
+              </a:rPr>
+              <a:t>Energy Transfer in Ecosystems</a:t>
+            </a:r>
+            <a:endParaRPr lang="en-US" sz="1400" dirty="0"/>
+          </a:p>
+        </p:txBody>
+      </p:sp>
+      <p:sp>
+        <p:nvSpPr>
+          <p:cNvPr id="10" name="Text 8"/>
+          <p:cNvSpPr/>
+          <p:nvPr/>
+        </p:nvSpPr>
+        <p:spPr>
+          <a:xfrm>
+            <a:off x="1188720" y="1691640"/>
+            <a:ext cx="7132320" cy="320040"/>
+          </a:xfrm>
+          <a:prstGeom prst="rect">
+            <a:avLst/>
+          </a:prstGeom>
+          <a:noFill/>
+          <a:ln/>
+        </p:spPr>
+        <p:txBody>
+          <a:bodyPr wrap="square" rtlCol="0" anchor="ctr"/>
+          <a:lstStyle/>
+          <a:p>
+            <a:pPr indent="0" marL="0">
+              <a:buNone/>
+            </a:pPr>
+            <a:r>
+              <a:rPr lang="en-US" sz="1100" dirty="0">
+                <a:solidFill>
+                  <a:srgbClr val="6B6660"/>
+                </a:solidFill>
+                <a:latin typeface="Calibri" pitchFamily="34" charset="0"/>
+                <a:ea typeface="Calibri" pitchFamily="34" charset="-122"/>
+                <a:cs typeface="Calibri" pitchFamily="34" charset="-120"/>
+              </a:rPr>
+              <a:t>FuseSchool  •  4 min</a:t>
+            </a:r>
+            <a:endParaRPr lang="en-US" sz="1100" dirty="0"/>
+          </a:p>
+        </p:txBody>
+      </p:sp>
+      <p:sp>
+        <p:nvSpPr>
+          <p:cNvPr id="11" name="Shape 9"/>
+          <p:cNvSpPr/>
+          <p:nvPr/>
+        </p:nvSpPr>
+        <p:spPr>
+          <a:xfrm>
+            <a:off x="457200" y="2423160"/>
+            <a:ext cx="8229600" cy="1051560"/>
+          </a:xfrm>
+          <a:prstGeom prst="rect">
+            <a:avLst/>
+          </a:prstGeom>
+          <a:solidFill>
+            <a:srgbClr val="FFFFFF"/>
+          </a:solidFill>
+          <a:ln/>
+          <a:effectLst>
+            <a:outerShdw sx="100000" sy="100000" kx="0" ky="0" algn="bl" rotWithShape="0" blurRad="76200" dist="25400" dir="8100000">
+              <a:srgbClr val="000000">
+                <a:alpha val="12000"/>
+              </a:srgbClr>
+            </a:outerShdw>
+          </a:effectLst>
+        </p:spPr>
+      </p:sp>
+      <p:sp>
+        <p:nvSpPr>
+          <p:cNvPr id="12" name="Shape 10"/>
+          <p:cNvSpPr/>
+          <p:nvPr/>
+        </p:nvSpPr>
+        <p:spPr>
+          <a:xfrm>
+            <a:off x="457200" y="2423160"/>
+            <a:ext cx="64008" cy="1051560"/>
+          </a:xfrm>
+          <a:prstGeom prst="rect">
+            <a:avLst/>
+          </a:prstGeom>
+          <a:solidFill>
+            <a:srgbClr val="E9C46A"/>
+          </a:solidFill>
+          <a:ln/>
+        </p:spPr>
+      </p:sp>
+      <p:sp>
+        <p:nvSpPr>
+          <p:cNvPr id="13" name="Text 11"/>
+          <p:cNvSpPr/>
+          <p:nvPr/>
+        </p:nvSpPr>
+        <p:spPr>
+          <a:xfrm>
+            <a:off x="640080" y="2514600"/>
+            <a:ext cx="457200" cy="457200"/>
+          </a:xfrm>
+          <a:prstGeom prst="rect">
+            <a:avLst/>
+          </a:prstGeom>
+          <a:noFill/>
+          <a:ln/>
+        </p:spPr>
+        <p:txBody>
+          <a:bodyPr wrap="square" rtlCol="0" anchor="ctr"/>
+          <a:lstStyle/>
+          <a:p>
+            <a:pPr algn="ctr" indent="0" marL="0">
+              <a:buNone/>
+            </a:pPr>
+            <a:r>
+              <a:rPr lang="en-US" sz="2000" dirty="0">
+                <a:solidFill>
+                  <a:srgbClr val="E9C46A"/>
+                </a:solidFill>
+                <a:latin typeface="Calibri" pitchFamily="34" charset="0"/>
+                <a:ea typeface="Calibri" pitchFamily="34" charset="-122"/>
+                <a:cs typeface="Calibri" pitchFamily="34" charset="-120"/>
+              </a:rPr>
+              <a:t>▶</a:t>
+            </a:r>
+            <a:endParaRPr lang="en-US" sz="2000" dirty="0"/>
+          </a:p>
+        </p:txBody>
+      </p:sp>
+      <p:sp>
+        <p:nvSpPr>
+          <p:cNvPr id="14" name="Text 12"/>
+          <p:cNvSpPr/>
+          <p:nvPr/>
+        </p:nvSpPr>
+        <p:spPr>
+          <a:xfrm>
+            <a:off x="1188720" y="2496312"/>
+            <a:ext cx="7132320" cy="411480"/>
+          </a:xfrm>
+          <a:prstGeom prst="rect">
+            <a:avLst/>
+          </a:prstGeom>
+          <a:noFill/>
+          <a:ln/>
+        </p:spPr>
+        <p:txBody>
+          <a:bodyPr wrap="square" rtlCol="0" anchor="ctr"/>
+          <a:lstStyle/>
+          <a:p>
+            <a:pPr indent="0" marL="0">
+              <a:buNone/>
+            </a:pPr>
+            <a:r>
+              <a:rPr lang="en-US" sz="1400" b="1" dirty="0">
+                <a:solidFill>
+                  <a:srgbClr val="1B2A4A"/>
+                </a:solidFill>
+                <a:latin typeface="Calibri" pitchFamily="34" charset="0"/>
+                <a:ea typeface="Calibri" pitchFamily="34" charset="-122"/>
+                <a:cs typeface="Calibri" pitchFamily="34" charset="-120"/>
+              </a:rPr>
+              <a:t>The 10% Rule — Energy Pyramids</a:t>
+            </a:r>
+            <a:endParaRPr lang="en-US" sz="1400" dirty="0"/>
+          </a:p>
+        </p:txBody>
+      </p:sp>
+      <p:sp>
+        <p:nvSpPr>
+          <p:cNvPr id="15" name="Text 13"/>
+          <p:cNvSpPr/>
+          <p:nvPr/>
+        </p:nvSpPr>
+        <p:spPr>
+          <a:xfrm>
+            <a:off x="1188720" y="2880360"/>
+            <a:ext cx="7132320" cy="320040"/>
+          </a:xfrm>
+          <a:prstGeom prst="rect">
+            <a:avLst/>
+          </a:prstGeom>
+          <a:noFill/>
+          <a:ln/>
+        </p:spPr>
+        <p:txBody>
+          <a:bodyPr wrap="square" rtlCol="0" anchor="ctr"/>
+          <a:lstStyle/>
+          <a:p>
+            <a:pPr indent="0" marL="0">
+              <a:buNone/>
+            </a:pPr>
+            <a:r>
+              <a:rPr lang="en-US" sz="1100" dirty="0">
+                <a:solidFill>
+                  <a:srgbClr val="6B6660"/>
+                </a:solidFill>
+                <a:latin typeface="Calibri" pitchFamily="34" charset="0"/>
+                <a:ea typeface="Calibri" pitchFamily="34" charset="-122"/>
+                <a:cs typeface="Calibri" pitchFamily="34" charset="-120"/>
+              </a:rPr>
+              <a:t>Bozeman Science  •  7 min</a:t>
+            </a:r>
+            <a:endParaRPr lang="en-US" sz="1100" dirty="0"/>
+          </a:p>
+        </p:txBody>
+      </p:sp>
+      <p:sp>
+        <p:nvSpPr>
+          <p:cNvPr id="16" name="Shape 14"/>
+          <p:cNvSpPr/>
+          <p:nvPr/>
+        </p:nvSpPr>
+        <p:spPr>
+          <a:xfrm>
+            <a:off x="457200" y="3611880"/>
+            <a:ext cx="8229600" cy="1051560"/>
+          </a:xfrm>
+          <a:prstGeom prst="rect">
+            <a:avLst/>
+          </a:prstGeom>
+          <a:solidFill>
+            <a:srgbClr val="FFFFFF"/>
+          </a:solidFill>
+          <a:ln/>
+          <a:effectLst>
+            <a:outerShdw sx="100000" sy="100000" kx="0" ky="0" algn="bl" rotWithShape="0" blurRad="76200" dist="25400" dir="8100000">
+              <a:srgbClr val="000000">
+                <a:alpha val="12000"/>
+              </a:srgbClr>
+            </a:outerShdw>
+          </a:effectLst>
+        </p:spPr>
+      </p:sp>
+      <p:sp>
+        <p:nvSpPr>
+          <p:cNvPr id="17" name="Shape 15"/>
+          <p:cNvSpPr/>
+          <p:nvPr/>
+        </p:nvSpPr>
+        <p:spPr>
+          <a:xfrm>
+            <a:off x="457200" y="3611880"/>
+            <a:ext cx="64008" cy="1051560"/>
+          </a:xfrm>
+          <a:prstGeom prst="rect">
+            <a:avLst/>
+          </a:prstGeom>
+          <a:solidFill>
+            <a:srgbClr val="E9C46A"/>
+          </a:solidFill>
+          <a:ln/>
+        </p:spPr>
+      </p:sp>
+      <p:sp>
+        <p:nvSpPr>
+          <p:cNvPr id="18" name="Text 16"/>
+          <p:cNvSpPr/>
+          <p:nvPr/>
+        </p:nvSpPr>
+        <p:spPr>
+          <a:xfrm>
+            <a:off x="640080" y="3703320"/>
+            <a:ext cx="457200" cy="457200"/>
+          </a:xfrm>
+          <a:prstGeom prst="rect">
+            <a:avLst/>
+          </a:prstGeom>
+          <a:noFill/>
+          <a:ln/>
+        </p:spPr>
+        <p:txBody>
+          <a:bodyPr wrap="square" rtlCol="0" anchor="ctr"/>
+          <a:lstStyle/>
+          <a:p>
+            <a:pPr algn="ctr" indent="0" marL="0">
+              <a:buNone/>
+            </a:pPr>
+            <a:r>
+              <a:rPr lang="en-US" sz="2000" dirty="0">
+                <a:solidFill>
+                  <a:srgbClr val="E9C46A"/>
+                </a:solidFill>
+                <a:latin typeface="Calibri" pitchFamily="34" charset="0"/>
+                <a:ea typeface="Calibri" pitchFamily="34" charset="-122"/>
+                <a:cs typeface="Calibri" pitchFamily="34" charset="-120"/>
+              </a:rPr>
+              <a:t>▶</a:t>
+            </a:r>
+            <a:endParaRPr lang="en-US" sz="2000" dirty="0"/>
+          </a:p>
+        </p:txBody>
+      </p:sp>
+      <p:sp>
+        <p:nvSpPr>
+          <p:cNvPr id="19" name="Text 17"/>
+          <p:cNvSpPr/>
+          <p:nvPr/>
+        </p:nvSpPr>
+        <p:spPr>
+          <a:xfrm>
+            <a:off x="1188720" y="3685032"/>
+            <a:ext cx="7132320" cy="411480"/>
+          </a:xfrm>
+          <a:prstGeom prst="rect">
+            <a:avLst/>
+          </a:prstGeom>
+          <a:noFill/>
+          <a:ln/>
+        </p:spPr>
+        <p:txBody>
+          <a:bodyPr wrap="square" rtlCol="0" anchor="ctr"/>
+          <a:lstStyle/>
+          <a:p>
+            <a:pPr indent="0" marL="0">
+              <a:buNone/>
+            </a:pPr>
+            <a:r>
+              <a:rPr lang="en-US" sz="1400" b="1" dirty="0">
+                <a:solidFill>
+                  <a:srgbClr val="1B2A4A"/>
+                </a:solidFill>
+                <a:latin typeface="Calibri" pitchFamily="34" charset="0"/>
+                <a:ea typeface="Calibri" pitchFamily="34" charset="-122"/>
+                <a:cs typeface="Calibri" pitchFamily="34" charset="-120"/>
+              </a:rPr>
+              <a:t>Why Food Chains Are Short</a:t>
+            </a:r>
+            <a:endParaRPr lang="en-US" sz="1400" dirty="0"/>
+          </a:p>
+        </p:txBody>
+      </p:sp>
+      <p:sp>
+        <p:nvSpPr>
+          <p:cNvPr id="20" name="Text 18"/>
+          <p:cNvSpPr/>
+          <p:nvPr/>
+        </p:nvSpPr>
+        <p:spPr>
+          <a:xfrm>
+            <a:off x="1188720" y="4069080"/>
+            <a:ext cx="7132320" cy="320040"/>
+          </a:xfrm>
+          <a:prstGeom prst="rect">
+            <a:avLst/>
+          </a:prstGeom>
+          <a:noFill/>
+          <a:ln/>
+        </p:spPr>
+        <p:txBody>
+          <a:bodyPr wrap="square" rtlCol="0" anchor="ctr"/>
+          <a:lstStyle/>
+          <a:p>
+            <a:pPr indent="0" marL="0">
+              <a:buNone/>
+            </a:pPr>
+            <a:r>
+              <a:rPr lang="en-US" sz="1100" dirty="0">
+                <a:solidFill>
+                  <a:srgbClr val="6B6660"/>
+                </a:solidFill>
+                <a:latin typeface="Calibri" pitchFamily="34" charset="0"/>
+                <a:ea typeface="Calibri" pitchFamily="34" charset="-122"/>
+                <a:cs typeface="Calibri" pitchFamily="34" charset="-120"/>
+              </a:rPr>
+              <a:t>Cognito  •  4 min</a:t>
+            </a:r>
+            <a:endParaRPr lang="en-US" sz="1100" dirty="0"/>
+          </a:p>
+        </p:txBody>
+      </p:sp>
+    </p:spTree>
+  </p:cSld>
+  <p:clrMapOvr>
+    <a:masterClrMapping/>
+  </p:clrMapOvr>
+</p:sld>
+</file>
+
+<file path=ppt/slides/slide8.xml><?xml version="1.0" encoding="utf-8"?>
+<p:sld xmlns:a="http://schemas.openxmlformats.org/drawingml/2006/main" xmlns:r="http://schemas.openxmlformats.org/officeDocument/2006/relationships" xmlns:p="http://schemas.openxmlformats.org/presentationml/2006/main">
+  <p:cSld name="Slide 8">
+    <p:spTree>
+      <p:nvGrpSpPr>
+        <p:cNvPr id="1" name=""/>
+        <p:cNvGrpSpPr/>
+        <p:nvPr/>
+      </p:nvGrpSpPr>
+      <p:grpSpPr>
+        <a:xfrm>
+          <a:off x="0" y="0"/>
+          <a:ext cx="0" cy="0"/>
+          <a:chOff x="0" y="0"/>
+          <a:chExt cx="0" cy="0"/>
+        </a:xfrm>
+      </p:grpSpPr>
+      <p:sp>
+        <p:nvSpPr>
+          <p:cNvPr id="2" name="Shape 0"/>
+          <p:cNvSpPr/>
+          <p:nvPr/>
+        </p:nvSpPr>
+        <p:spPr>
+          <a:xfrm>
+            <a:off x="0" y="0"/>
+            <a:ext cx="9144000" cy="5143500"/>
+          </a:xfrm>
+          <a:prstGeom prst="rect">
+            <a:avLst/>
+          </a:prstGeom>
+          <a:solidFill>
+            <a:srgbClr val="1B2A4A"/>
+          </a:solidFill>
+          <a:ln/>
+        </p:spPr>
+      </p:sp>
+      <p:sp>
+        <p:nvSpPr>
+          <p:cNvPr id="3" name="Shape 1"/>
+          <p:cNvSpPr/>
+          <p:nvPr/>
+        </p:nvSpPr>
+        <p:spPr>
+          <a:xfrm>
+            <a:off x="0" y="4777740"/>
+            <a:ext cx="9144000" cy="365760"/>
+          </a:xfrm>
+          <a:prstGeom prst="rect">
+            <a:avLst/>
+          </a:prstGeom>
+          <a:solidFill>
+            <a:srgbClr val="E9C46A"/>
+          </a:solidFill>
+          <a:ln/>
+        </p:spPr>
+      </p:sp>
+      <p:sp>
+        <p:nvSpPr>
+          <p:cNvPr id="4" name="Text 2"/>
+          <p:cNvSpPr/>
+          <p:nvPr/>
+        </p:nvSpPr>
+        <p:spPr>
+          <a:xfrm>
+            <a:off x="731520" y="1371600"/>
+            <a:ext cx="7680960" cy="914400"/>
+          </a:xfrm>
+          <a:prstGeom prst="rect">
+            <a:avLst/>
+          </a:prstGeom>
+          <a:noFill/>
+          <a:ln/>
+        </p:spPr>
+        <p:txBody>
+          <a:bodyPr wrap="square" rtlCol="0" anchor="ctr"/>
+          <a:lstStyle/>
+          <a:p>
+            <a:pPr algn="ctr" indent="0" marL="0">
+              <a:buNone/>
+            </a:pPr>
+            <a:r>
+              <a:rPr lang="en-US" sz="3600" b="1" dirty="0">
+                <a:solidFill>
+                  <a:srgbClr val="FFFFFF"/>
+                </a:solidFill>
+                <a:latin typeface="Georgia" pitchFamily="34" charset="0"/>
+                <a:ea typeface="Georgia" pitchFamily="34" charset="-122"/>
+                <a:cs typeface="Georgia" pitchFamily="34" charset="-120"/>
+              </a:rPr>
+              <a:t>Review &amp; Practise</a:t>
+            </a:r>
+            <a:endParaRPr lang="en-US" sz="3600" dirty="0"/>
+          </a:p>
+        </p:txBody>
+      </p:sp>
+      <p:sp>
+        <p:nvSpPr>
+          <p:cNvPr id="5" name="Text 3"/>
+          <p:cNvSpPr/>
+          <p:nvPr/>
+        </p:nvSpPr>
+        <p:spPr>
+          <a:xfrm>
+            <a:off x="731520" y="2560320"/>
+            <a:ext cx="7680960" cy="548640"/>
+          </a:xfrm>
+          <a:prstGeom prst="rect">
+            <a:avLst/>
+          </a:prstGeom>
+          <a:noFill/>
+          <a:ln/>
+        </p:spPr>
+        <p:txBody>
+          <a:bodyPr wrap="square" rtlCol="0" anchor="ctr"/>
+          <a:lstStyle/>
+          <a:p>
+            <a:pPr algn="ctr" indent="0" marL="0">
+              <a:buNone/>
+            </a:pPr>
+            <a:r>
+              <a:rPr lang="en-US" sz="2000" dirty="0">
+                <a:solidFill>
+                  <a:srgbClr val="E9C46A"/>
+                </a:solidFill>
+                <a:latin typeface="Calibri" pitchFamily="34" charset="0"/>
+                <a:ea typeface="Calibri" pitchFamily="34" charset="-122"/>
+                <a:cs typeface="Calibri" pitchFamily="34" charset="-120"/>
+              </a:rPr>
               <a:t>mrzocchi.com</a:t>
             </a:r>
-            <a:endParaRPr lang="en-US" sz="1400" dirty="0"/>
+            <a:endParaRPr lang="en-US" sz="2000" dirty="0"/>
           </a:p>
         </p:txBody>
       </p:sp>
